--- a/Mapped Curriculum Lessons/Grade 6/Lesson 10 - Choosing Loop Structures/Choosing Loop Structures - Slides.pptx
+++ b/Mapped Curriculum Lessons/Grade 6/Lesson 10 - Choosing Loop Structures/Choosing Loop Structures - Slides.pptx
@@ -2,28 +2,28 @@
 <file path=ppt/presentation.xml><?xml version="1.0" encoding="utf-8"?>
 <p:presentation xmlns:p="http://schemas.openxmlformats.org/presentationml/2006/main" embedTrueTypeFonts="1" saveSubsetFonts="0">
   <p:sldMasterIdLst>
-    <p:sldMasterId xmlns:r="http://schemas.openxmlformats.org/officeDocument/2006/relationships" id="2147483648" r:id="Re6481329425f4999"/>
+    <p:sldMasterId xmlns:r="http://schemas.openxmlformats.org/officeDocument/2006/relationships" id="2147483648" r:id="Rfde5e6d61012480a"/>
   </p:sldMasterIdLst>
   <p:notesMasterIdLst>
-    <p:notesMasterId xmlns:r="http://schemas.openxmlformats.org/officeDocument/2006/relationships" r:id="R9c63bbbfc7404a20"/>
+    <p:notesMasterId xmlns:r="http://schemas.openxmlformats.org/officeDocument/2006/relationships" r:id="Rf77612d563bf490a"/>
   </p:notesMasterIdLst>
   <p:sldIdLst>
-    <p:sldId xmlns:r="http://schemas.openxmlformats.org/officeDocument/2006/relationships" id="256" r:id="Rebfa3f2b92b941c4"/>
-    <p:sldId xmlns:r="http://schemas.openxmlformats.org/officeDocument/2006/relationships" id="257" r:id="Rf1966963c6c548a6"/>
-    <p:sldId xmlns:r="http://schemas.openxmlformats.org/officeDocument/2006/relationships" id="258" r:id="R8d5e4e5cc5254b86"/>
-    <p:sldId xmlns:r="http://schemas.openxmlformats.org/officeDocument/2006/relationships" id="259" r:id="R9613cf3d0edc45d8"/>
-    <p:sldId xmlns:r="http://schemas.openxmlformats.org/officeDocument/2006/relationships" id="260" r:id="R7a541e09d2f54a44"/>
-    <p:sldId xmlns:r="http://schemas.openxmlformats.org/officeDocument/2006/relationships" id="261" r:id="Rb5d8999fd7dc4efd"/>
-    <p:sldId xmlns:r="http://schemas.openxmlformats.org/officeDocument/2006/relationships" id="262" r:id="R08f310031dc44f67"/>
-    <p:sldId xmlns:r="http://schemas.openxmlformats.org/officeDocument/2006/relationships" id="263" r:id="Rd6c30b9ca4e24d49"/>
-    <p:sldId xmlns:r="http://schemas.openxmlformats.org/officeDocument/2006/relationships" id="264" r:id="R030af748956a450d"/>
+    <p:sldId xmlns:r="http://schemas.openxmlformats.org/officeDocument/2006/relationships" id="256" r:id="R9536884850b54da7"/>
+    <p:sldId xmlns:r="http://schemas.openxmlformats.org/officeDocument/2006/relationships" id="257" r:id="R7edf2cf7727e43f6"/>
+    <p:sldId xmlns:r="http://schemas.openxmlformats.org/officeDocument/2006/relationships" id="258" r:id="R84d8bc8c8a9949e9"/>
+    <p:sldId xmlns:r="http://schemas.openxmlformats.org/officeDocument/2006/relationships" id="259" r:id="Ra3502e7868064094"/>
+    <p:sldId xmlns:r="http://schemas.openxmlformats.org/officeDocument/2006/relationships" id="260" r:id="R630a1aa0b9ba4a25"/>
+    <p:sldId xmlns:r="http://schemas.openxmlformats.org/officeDocument/2006/relationships" id="261" r:id="R7bbaa1f3e47b4e91"/>
+    <p:sldId xmlns:r="http://schemas.openxmlformats.org/officeDocument/2006/relationships" id="262" r:id="R953f8cbc1bdd4a94"/>
+    <p:sldId xmlns:r="http://schemas.openxmlformats.org/officeDocument/2006/relationships" id="263" r:id="R4a3cb916e2c34d8c"/>
+    <p:sldId xmlns:r="http://schemas.openxmlformats.org/officeDocument/2006/relationships" id="264" r:id="R8f34a58833ab414d"/>
   </p:sldIdLst>
   <p:sldSz cx="12192000" cy="6858000"/>
   <p:notesSz cx="6858000" cy="9144000"/>
   <p:embeddedFontLst>
     <p:embeddedFont>
       <p:font typeface="JetBrains Mono"/>
-      <p:regular xmlns:r="http://schemas.openxmlformats.org/officeDocument/2006/relationships" r:id="R9b0fa8930b4c4fa1"/>
+      <p:regular xmlns:r="http://schemas.openxmlformats.org/officeDocument/2006/relationships" r:id="Ra72a9e99a05d4564"/>
     </p:embeddedFont>
   </p:embeddedFontLst>
 </p:presentation>
@@ -1071,7 +1071,7 @@
           <p:nvPr/>
         </p:nvPicPr>
         <p:blipFill rotWithShape="1">
-          <a:blip xmlns:r="http://schemas.openxmlformats.org/officeDocument/2006/relationships" xmlns:a="http://schemas.openxmlformats.org/drawingml/2006/main" r:embed="R5fe41369589d448a"/>
+          <a:blip xmlns:r="http://schemas.openxmlformats.org/officeDocument/2006/relationships" xmlns:a="http://schemas.openxmlformats.org/drawingml/2006/main" r:embed="Rbdda70508b654ad2"/>
           <a:stretch xmlns:a="http://schemas.openxmlformats.org/drawingml/2006/main"/>
         </p:blipFill>
         <p:spPr>
@@ -1451,7 +1451,7 @@
           <p:nvPr/>
         </p:nvPicPr>
         <p:blipFill rotWithShape="1">
-          <a:blip xmlns:r="http://schemas.openxmlformats.org/officeDocument/2006/relationships" xmlns:a="http://schemas.openxmlformats.org/drawingml/2006/main" r:embed="R81335d5e236247c5">
+          <a:blip xmlns:r="http://schemas.openxmlformats.org/officeDocument/2006/relationships" xmlns:a="http://schemas.openxmlformats.org/drawingml/2006/main" r:embed="Rf215e147e3a6422b">
             <a:alphaModFix amt="28000"/>
           </a:blip>
           <a:stretch xmlns:a="http://schemas.openxmlformats.org/drawingml/2006/main"/>
@@ -1664,7 +1664,7 @@
           <p:nvPr/>
         </p:nvPicPr>
         <p:blipFill rotWithShape="1">
-          <a:blip xmlns:r="http://schemas.openxmlformats.org/officeDocument/2006/relationships" xmlns:a="http://schemas.openxmlformats.org/drawingml/2006/main" r:embed="R60f1c45de4d04621">
+          <a:blip xmlns:r="http://schemas.openxmlformats.org/officeDocument/2006/relationships" xmlns:a="http://schemas.openxmlformats.org/drawingml/2006/main" r:embed="R865bf7a1fedb4835">
             <a:alphaModFix amt="28000"/>
           </a:blip>
           <a:stretch xmlns:a="http://schemas.openxmlformats.org/drawingml/2006/main"/>
@@ -1899,7 +1899,7 @@
           <p:nvPr/>
         </p:nvPicPr>
         <p:blipFill rotWithShape="1">
-          <a:blip xmlns:r="http://schemas.openxmlformats.org/officeDocument/2006/relationships" xmlns:a="http://schemas.openxmlformats.org/drawingml/2006/main" r:embed="Rcc499ca46329467d">
+          <a:blip xmlns:r="http://schemas.openxmlformats.org/officeDocument/2006/relationships" xmlns:a="http://schemas.openxmlformats.org/drawingml/2006/main" r:embed="R6d281691d54e4c96">
             <a:alphaModFix amt="28000"/>
           </a:blip>
           <a:stretch xmlns:a="http://schemas.openxmlformats.org/drawingml/2006/main"/>
@@ -2176,7 +2176,7 @@
           <p:nvPr/>
         </p:nvPicPr>
         <p:blipFill rotWithShape="1">
-          <a:blip xmlns:r="http://schemas.openxmlformats.org/officeDocument/2006/relationships" xmlns:a="http://schemas.openxmlformats.org/drawingml/2006/main" r:embed="Raea9ba9f60194a83">
+          <a:blip xmlns:r="http://schemas.openxmlformats.org/officeDocument/2006/relationships" xmlns:a="http://schemas.openxmlformats.org/drawingml/2006/main" r:embed="R7be4816058354c72">
             <a:alphaModFix amt="28000"/>
           </a:blip>
           <a:stretch xmlns:a="http://schemas.openxmlformats.org/drawingml/2006/main"/>
@@ -2451,7 +2451,7 @@
           <p:nvPr/>
         </p:nvPicPr>
         <p:blipFill rotWithShape="1">
-          <a:blip xmlns:r="http://schemas.openxmlformats.org/officeDocument/2006/relationships" xmlns:a="http://schemas.openxmlformats.org/drawingml/2006/main" r:embed="R43c1f962a7bf4d2c">
+          <a:blip xmlns:r="http://schemas.openxmlformats.org/officeDocument/2006/relationships" xmlns:a="http://schemas.openxmlformats.org/drawingml/2006/main" r:embed="R1cbc1b67d25f4fdb">
             <a:alphaModFix amt="28000"/>
           </a:blip>
           <a:stretch xmlns:a="http://schemas.openxmlformats.org/drawingml/2006/main"/>
@@ -2875,7 +2875,7 @@
           <p:nvPr/>
         </p:nvPicPr>
         <p:blipFill rotWithShape="1">
-          <a:blip xmlns:r="http://schemas.openxmlformats.org/officeDocument/2006/relationships" xmlns:a="http://schemas.openxmlformats.org/drawingml/2006/main" r:embed="Rfd68e26d4bed431c">
+          <a:blip xmlns:r="http://schemas.openxmlformats.org/officeDocument/2006/relationships" xmlns:a="http://schemas.openxmlformats.org/drawingml/2006/main" r:embed="R2c7bd40f701f45f1">
             <a:alphaModFix amt="28000"/>
           </a:blip>
           <a:stretch xmlns:a="http://schemas.openxmlformats.org/drawingml/2006/main"/>
@@ -3016,7 +3016,7 @@
           <p:nvPr/>
         </p:nvPicPr>
         <p:blipFill rotWithShape="1">
-          <a:blip xmlns:r="http://schemas.openxmlformats.org/officeDocument/2006/relationships" xmlns:a="http://schemas.openxmlformats.org/drawingml/2006/main" r:embed="Ra0ec8056c8e24e30">
+          <a:blip xmlns:r="http://schemas.openxmlformats.org/officeDocument/2006/relationships" xmlns:a="http://schemas.openxmlformats.org/drawingml/2006/main" r:embed="Rc2460140c0364b24">
             <a:alphaModFix amt="28000"/>
           </a:blip>
           <a:stretch xmlns:a="http://schemas.openxmlformats.org/drawingml/2006/main"/>
@@ -3130,7 +3130,7 @@
           <p:nvPr/>
         </p:nvPicPr>
         <p:blipFill rotWithShape="1">
-          <a:blip xmlns:r="http://schemas.openxmlformats.org/officeDocument/2006/relationships" xmlns:a="http://schemas.openxmlformats.org/drawingml/2006/main" r:embed="R7733d4970aee4d61">
+          <a:blip xmlns:r="http://schemas.openxmlformats.org/officeDocument/2006/relationships" xmlns:a="http://schemas.openxmlformats.org/drawingml/2006/main" r:embed="R48e4ce39668149b3">
             <a:alphaModFix amt="28000"/>
           </a:blip>
           <a:stretch xmlns:a="http://schemas.openxmlformats.org/drawingml/2006/main"/>
@@ -3457,7 +3457,7 @@
           <p:nvPr/>
         </p:nvPicPr>
         <p:blipFill rotWithShape="1">
-          <a:blip xmlns:r="http://schemas.openxmlformats.org/officeDocument/2006/relationships" xmlns:a="http://schemas.openxmlformats.org/drawingml/2006/main" r:embed="Reb99a0fad2e2438c">
+          <a:blip xmlns:r="http://schemas.openxmlformats.org/officeDocument/2006/relationships" xmlns:a="http://schemas.openxmlformats.org/drawingml/2006/main" r:embed="Ra88572b6d7214065">
             <a:alphaModFix amt="28000"/>
           </a:blip>
           <a:stretch xmlns:a="http://schemas.openxmlformats.org/drawingml/2006/main"/>
@@ -3745,7 +3745,7 @@
           <p:nvPr/>
         </p:nvPicPr>
         <p:blipFill rotWithShape="1">
-          <a:blip xmlns:r="http://schemas.openxmlformats.org/officeDocument/2006/relationships" xmlns:a="http://schemas.openxmlformats.org/drawingml/2006/main" r:embed="R00a4b614a9a7493c">
+          <a:blip xmlns:r="http://schemas.openxmlformats.org/officeDocument/2006/relationships" xmlns:a="http://schemas.openxmlformats.org/drawingml/2006/main" r:embed="R67a2168956c148da">
             <a:alphaModFix amt="28000"/>
           </a:blip>
           <a:stretch xmlns:a="http://schemas.openxmlformats.org/drawingml/2006/main"/>
@@ -3982,17 +3982,17 @@
   </p:cSld>
   <p:clrMap bg1="lt1" tx1="dk1" bg2="lt2" tx2="dk2" accent1="accent1" accent2="accent2" accent3="accent3" accent4="accent4" accent5="accent5" accent6="accent6" hlink="hlink" folHlink="folHlink"/>
   <p:sldLayoutIdLst>
-    <p:sldLayoutId xmlns:r="http://schemas.openxmlformats.org/officeDocument/2006/relationships" id="2147483649" r:id="R3bb8a7fcbf6a48ac"/>
-    <p:sldLayoutId xmlns:r="http://schemas.openxmlformats.org/officeDocument/2006/relationships" id="2147483650" r:id="R6140c5de843c47ee"/>
-    <p:sldLayoutId xmlns:r="http://schemas.openxmlformats.org/officeDocument/2006/relationships" id="2147483651" r:id="R27cf4619f4574196"/>
-    <p:sldLayoutId xmlns:r="http://schemas.openxmlformats.org/officeDocument/2006/relationships" id="2147483652" r:id="R0b227f7210064797"/>
-    <p:sldLayoutId xmlns:r="http://schemas.openxmlformats.org/officeDocument/2006/relationships" id="2147483653" r:id="Rc03bc122557d407d"/>
-    <p:sldLayoutId xmlns:r="http://schemas.openxmlformats.org/officeDocument/2006/relationships" id="2147483654" r:id="R3b6381c9210547dc"/>
-    <p:sldLayoutId xmlns:r="http://schemas.openxmlformats.org/officeDocument/2006/relationships" id="2147483655" r:id="R239058b773764d8e"/>
-    <p:sldLayoutId xmlns:r="http://schemas.openxmlformats.org/officeDocument/2006/relationships" id="2147483656" r:id="R6c24bd78d62146db"/>
-    <p:sldLayoutId xmlns:r="http://schemas.openxmlformats.org/officeDocument/2006/relationships" id="2147483657" r:id="R9587a907a9fd4a01"/>
-    <p:sldLayoutId xmlns:r="http://schemas.openxmlformats.org/officeDocument/2006/relationships" id="2147483658" r:id="R6a4c3908ae6e4962"/>
-    <p:sldLayoutId xmlns:r="http://schemas.openxmlformats.org/officeDocument/2006/relationships" id="2147483659" r:id="Reccde138909f4209"/>
+    <p:sldLayoutId xmlns:r="http://schemas.openxmlformats.org/officeDocument/2006/relationships" id="2147483649" r:id="R004582fbb17c4635"/>
+    <p:sldLayoutId xmlns:r="http://schemas.openxmlformats.org/officeDocument/2006/relationships" id="2147483650" r:id="R35da679449824251"/>
+    <p:sldLayoutId xmlns:r="http://schemas.openxmlformats.org/officeDocument/2006/relationships" id="2147483651" r:id="R7431f412b8884489"/>
+    <p:sldLayoutId xmlns:r="http://schemas.openxmlformats.org/officeDocument/2006/relationships" id="2147483652" r:id="R395a85a25f7441d7"/>
+    <p:sldLayoutId xmlns:r="http://schemas.openxmlformats.org/officeDocument/2006/relationships" id="2147483653" r:id="R7cc5a3cae78143a6"/>
+    <p:sldLayoutId xmlns:r="http://schemas.openxmlformats.org/officeDocument/2006/relationships" id="2147483654" r:id="R08a4a8ea377e4732"/>
+    <p:sldLayoutId xmlns:r="http://schemas.openxmlformats.org/officeDocument/2006/relationships" id="2147483655" r:id="Rf59d630e17bc45a3"/>
+    <p:sldLayoutId xmlns:r="http://schemas.openxmlformats.org/officeDocument/2006/relationships" id="2147483656" r:id="R086e6b065ae34a36"/>
+    <p:sldLayoutId xmlns:r="http://schemas.openxmlformats.org/officeDocument/2006/relationships" id="2147483657" r:id="R63eaaa040fbb44c4"/>
+    <p:sldLayoutId xmlns:r="http://schemas.openxmlformats.org/officeDocument/2006/relationships" id="2147483658" r:id="R2abca8a5e43d4bed"/>
+    <p:sldLayoutId xmlns:r="http://schemas.openxmlformats.org/officeDocument/2006/relationships" id="2147483659" r:id="Re06e07aed0b04470"/>
   </p:sldLayoutIdLst>
   <p:hf hdr="0" ftr="0" dt="0"/>
   <p:txStyles>
@@ -7505,29 +7505,7 @@
                 <a:ea typeface="Calibri"/>
                 <a:cs typeface="Calibri"/>
               </a:rPr>
-              <a:t>Make the counted warm-up display rounds 1 to 5. The condition-controlled section must still finish only when the user types </a:t>
-            </a:r>
-            <a:r>
-              <a:rPr sz="2400" b="0">
-                <a:solidFill>
-                  <a:srgbClr val="067D17"/>
-                </a:solidFill>
-                <a:latin typeface="JetBrains Mono"/>
-                <a:ea typeface="JetBrains Mono"/>
-                <a:cs typeface="JetBrains Mono"/>
-              </a:rPr>
-              <a:t>"done"</a:t>
-            </a:r>
-            <a:r>
-              <a:rPr sz="2400" b="0">
-                <a:solidFill>
-                  <a:srgbClr val="080808"/>
-                </a:solidFill>
-                <a:latin typeface="Calibri"/>
-                <a:ea typeface="Calibri"/>
-                <a:cs typeface="Calibri"/>
-              </a:rPr>
-              <a:t>.</a:t>
+              <a:t>Make the counted warm-up display rounds 1 to 5. The condition-controlled section must still finish only when the user types done.</a:t>
             </a:r>
           </a:p>
         </p:txBody>
@@ -8282,51 +8260,7 @@
                 <a:ea typeface="Calibri"/>
                 <a:cs typeface="Calibri"/>
               </a:rPr>
-              <a:t> loop. After </a:t>
-            </a:r>
-            <a:r>
-              <a:rPr sz="2400" b="0">
-                <a:solidFill>
-                  <a:srgbClr val="067D17"/>
-                </a:solidFill>
-                <a:latin typeface="JetBrains Mono"/>
-                <a:ea typeface="JetBrains Mono"/>
-                <a:cs typeface="JetBrains Mono"/>
-              </a:rPr>
-              <a:t>"done"</a:t>
-            </a:r>
-            <a:r>
-              <a:rPr sz="2400" b="0">
-                <a:solidFill>
-                  <a:srgbClr val="080808"/>
-                </a:solidFill>
-                <a:latin typeface="Calibri"/>
-                <a:ea typeface="Calibri"/>
-                <a:cs typeface="Calibri"/>
-              </a:rPr>
-              <a:t> is entered, display the number of answers entered. For wait, wait, </a:t>
-            </a:r>
-            <a:r>
-              <a:rPr sz="2400" b="0">
-                <a:solidFill>
-                  <a:srgbClr val="067D17"/>
-                </a:solidFill>
-                <a:latin typeface="JetBrains Mono"/>
-                <a:ea typeface="JetBrains Mono"/>
-                <a:cs typeface="JetBrains Mono"/>
-              </a:rPr>
-              <a:t>"done"</a:t>
-            </a:r>
-            <a:r>
-              <a:rPr sz="2400" b="0">
-                <a:solidFill>
-                  <a:srgbClr val="080808"/>
-                </a:solidFill>
-                <a:latin typeface="Calibri"/>
-                <a:ea typeface="Calibri"/>
-                <a:cs typeface="Calibri"/>
-              </a:rPr>
-              <a:t> the count must be 3.</a:t>
+              <a:t> loop. After done is entered, display the number of answers entered. For wait, wait, done the count must be 3.</a:t>
             </a:r>
           </a:p>
         </p:txBody>

--- a/Mapped Curriculum Lessons/Grade 6/Lesson 10 - Choosing Loop Structures/Choosing Loop Structures - Slides.pptx
+++ b/Mapped Curriculum Lessons/Grade 6/Lesson 10 - Choosing Loop Structures/Choosing Loop Structures - Slides.pptx
@@ -2,28 +2,28 @@
 <file path=ppt/presentation.xml><?xml version="1.0" encoding="utf-8"?>
 <p:presentation xmlns:p="http://schemas.openxmlformats.org/presentationml/2006/main" embedTrueTypeFonts="1" saveSubsetFonts="0">
   <p:sldMasterIdLst>
-    <p:sldMasterId xmlns:r="http://schemas.openxmlformats.org/officeDocument/2006/relationships" id="2147483648" r:id="Rfde5e6d61012480a"/>
+    <p:sldMasterId xmlns:r="http://schemas.openxmlformats.org/officeDocument/2006/relationships" id="2147483648" r:id="Red69b22d65944f04"/>
   </p:sldMasterIdLst>
   <p:notesMasterIdLst>
-    <p:notesMasterId xmlns:r="http://schemas.openxmlformats.org/officeDocument/2006/relationships" r:id="Rf77612d563bf490a"/>
+    <p:notesMasterId xmlns:r="http://schemas.openxmlformats.org/officeDocument/2006/relationships" r:id="R727d9a93667a49cb"/>
   </p:notesMasterIdLst>
   <p:sldIdLst>
-    <p:sldId xmlns:r="http://schemas.openxmlformats.org/officeDocument/2006/relationships" id="256" r:id="R9536884850b54da7"/>
-    <p:sldId xmlns:r="http://schemas.openxmlformats.org/officeDocument/2006/relationships" id="257" r:id="R7edf2cf7727e43f6"/>
-    <p:sldId xmlns:r="http://schemas.openxmlformats.org/officeDocument/2006/relationships" id="258" r:id="R84d8bc8c8a9949e9"/>
-    <p:sldId xmlns:r="http://schemas.openxmlformats.org/officeDocument/2006/relationships" id="259" r:id="Ra3502e7868064094"/>
-    <p:sldId xmlns:r="http://schemas.openxmlformats.org/officeDocument/2006/relationships" id="260" r:id="R630a1aa0b9ba4a25"/>
-    <p:sldId xmlns:r="http://schemas.openxmlformats.org/officeDocument/2006/relationships" id="261" r:id="R7bbaa1f3e47b4e91"/>
-    <p:sldId xmlns:r="http://schemas.openxmlformats.org/officeDocument/2006/relationships" id="262" r:id="R953f8cbc1bdd4a94"/>
-    <p:sldId xmlns:r="http://schemas.openxmlformats.org/officeDocument/2006/relationships" id="263" r:id="R4a3cb916e2c34d8c"/>
-    <p:sldId xmlns:r="http://schemas.openxmlformats.org/officeDocument/2006/relationships" id="264" r:id="R8f34a58833ab414d"/>
+    <p:sldId xmlns:r="http://schemas.openxmlformats.org/officeDocument/2006/relationships" id="256" r:id="Raa27d317bf944179"/>
+    <p:sldId xmlns:r="http://schemas.openxmlformats.org/officeDocument/2006/relationships" id="257" r:id="R42e53ba2acec4c28"/>
+    <p:sldId xmlns:r="http://schemas.openxmlformats.org/officeDocument/2006/relationships" id="258" r:id="R7eb2b9c0bd184f6e"/>
+    <p:sldId xmlns:r="http://schemas.openxmlformats.org/officeDocument/2006/relationships" id="259" r:id="Ra6f147e267fe4be6"/>
+    <p:sldId xmlns:r="http://schemas.openxmlformats.org/officeDocument/2006/relationships" id="260" r:id="R0fc710591dda40b9"/>
+    <p:sldId xmlns:r="http://schemas.openxmlformats.org/officeDocument/2006/relationships" id="261" r:id="Re4012ad082be4890"/>
+    <p:sldId xmlns:r="http://schemas.openxmlformats.org/officeDocument/2006/relationships" id="262" r:id="Rcde118f83bbd4ffb"/>
+    <p:sldId xmlns:r="http://schemas.openxmlformats.org/officeDocument/2006/relationships" id="263" r:id="R369b5d11bb324e74"/>
+    <p:sldId xmlns:r="http://schemas.openxmlformats.org/officeDocument/2006/relationships" id="264" r:id="R290ddac947974187"/>
   </p:sldIdLst>
   <p:sldSz cx="12192000" cy="6858000"/>
   <p:notesSz cx="6858000" cy="9144000"/>
   <p:embeddedFontLst>
     <p:embeddedFont>
       <p:font typeface="JetBrains Mono"/>
-      <p:regular xmlns:r="http://schemas.openxmlformats.org/officeDocument/2006/relationships" r:id="Ra72a9e99a05d4564"/>
+      <p:regular xmlns:r="http://schemas.openxmlformats.org/officeDocument/2006/relationships" r:id="Rdb32a4a823ba4e2c"/>
     </p:embeddedFont>
   </p:embeddedFontLst>
 </p:presentation>
@@ -1071,7 +1071,7 @@
           <p:nvPr/>
         </p:nvPicPr>
         <p:blipFill rotWithShape="1">
-          <a:blip xmlns:r="http://schemas.openxmlformats.org/officeDocument/2006/relationships" xmlns:a="http://schemas.openxmlformats.org/drawingml/2006/main" r:embed="Rbdda70508b654ad2"/>
+          <a:blip xmlns:r="http://schemas.openxmlformats.org/officeDocument/2006/relationships" xmlns:a="http://schemas.openxmlformats.org/drawingml/2006/main" r:embed="Ra59a41ff2efc44b5"/>
           <a:stretch xmlns:a="http://schemas.openxmlformats.org/drawingml/2006/main"/>
         </p:blipFill>
         <p:spPr>
@@ -1451,7 +1451,7 @@
           <p:nvPr/>
         </p:nvPicPr>
         <p:blipFill rotWithShape="1">
-          <a:blip xmlns:r="http://schemas.openxmlformats.org/officeDocument/2006/relationships" xmlns:a="http://schemas.openxmlformats.org/drawingml/2006/main" r:embed="Rf215e147e3a6422b">
+          <a:blip xmlns:r="http://schemas.openxmlformats.org/officeDocument/2006/relationships" xmlns:a="http://schemas.openxmlformats.org/drawingml/2006/main" r:embed="R6a5ca5fc38fd4527">
             <a:alphaModFix amt="28000"/>
           </a:blip>
           <a:stretch xmlns:a="http://schemas.openxmlformats.org/drawingml/2006/main"/>
@@ -1664,7 +1664,7 @@
           <p:nvPr/>
         </p:nvPicPr>
         <p:blipFill rotWithShape="1">
-          <a:blip xmlns:r="http://schemas.openxmlformats.org/officeDocument/2006/relationships" xmlns:a="http://schemas.openxmlformats.org/drawingml/2006/main" r:embed="R865bf7a1fedb4835">
+          <a:blip xmlns:r="http://schemas.openxmlformats.org/officeDocument/2006/relationships" xmlns:a="http://schemas.openxmlformats.org/drawingml/2006/main" r:embed="R37e9fd90d29f4176">
             <a:alphaModFix amt="28000"/>
           </a:blip>
           <a:stretch xmlns:a="http://schemas.openxmlformats.org/drawingml/2006/main"/>
@@ -1899,7 +1899,7 @@
           <p:nvPr/>
         </p:nvPicPr>
         <p:blipFill rotWithShape="1">
-          <a:blip xmlns:r="http://schemas.openxmlformats.org/officeDocument/2006/relationships" xmlns:a="http://schemas.openxmlformats.org/drawingml/2006/main" r:embed="R6d281691d54e4c96">
+          <a:blip xmlns:r="http://schemas.openxmlformats.org/officeDocument/2006/relationships" xmlns:a="http://schemas.openxmlformats.org/drawingml/2006/main" r:embed="Rd19f0299a80d438c">
             <a:alphaModFix amt="28000"/>
           </a:blip>
           <a:stretch xmlns:a="http://schemas.openxmlformats.org/drawingml/2006/main"/>
@@ -2176,7 +2176,7 @@
           <p:nvPr/>
         </p:nvPicPr>
         <p:blipFill rotWithShape="1">
-          <a:blip xmlns:r="http://schemas.openxmlformats.org/officeDocument/2006/relationships" xmlns:a="http://schemas.openxmlformats.org/drawingml/2006/main" r:embed="R7be4816058354c72">
+          <a:blip xmlns:r="http://schemas.openxmlformats.org/officeDocument/2006/relationships" xmlns:a="http://schemas.openxmlformats.org/drawingml/2006/main" r:embed="Rbd775698b0614170">
             <a:alphaModFix amt="28000"/>
           </a:blip>
           <a:stretch xmlns:a="http://schemas.openxmlformats.org/drawingml/2006/main"/>
@@ -2451,7 +2451,7 @@
           <p:nvPr/>
         </p:nvPicPr>
         <p:blipFill rotWithShape="1">
-          <a:blip xmlns:r="http://schemas.openxmlformats.org/officeDocument/2006/relationships" xmlns:a="http://schemas.openxmlformats.org/drawingml/2006/main" r:embed="R1cbc1b67d25f4fdb">
+          <a:blip xmlns:r="http://schemas.openxmlformats.org/officeDocument/2006/relationships" xmlns:a="http://schemas.openxmlformats.org/drawingml/2006/main" r:embed="Rd8c30b3fe4d6453d">
             <a:alphaModFix amt="28000"/>
           </a:blip>
           <a:stretch xmlns:a="http://schemas.openxmlformats.org/drawingml/2006/main"/>
@@ -2875,7 +2875,7 @@
           <p:nvPr/>
         </p:nvPicPr>
         <p:blipFill rotWithShape="1">
-          <a:blip xmlns:r="http://schemas.openxmlformats.org/officeDocument/2006/relationships" xmlns:a="http://schemas.openxmlformats.org/drawingml/2006/main" r:embed="R2c7bd40f701f45f1">
+          <a:blip xmlns:r="http://schemas.openxmlformats.org/officeDocument/2006/relationships" xmlns:a="http://schemas.openxmlformats.org/drawingml/2006/main" r:embed="Reb245b348cb6489f">
             <a:alphaModFix amt="28000"/>
           </a:blip>
           <a:stretch xmlns:a="http://schemas.openxmlformats.org/drawingml/2006/main"/>
@@ -3016,7 +3016,7 @@
           <p:nvPr/>
         </p:nvPicPr>
         <p:blipFill rotWithShape="1">
-          <a:blip xmlns:r="http://schemas.openxmlformats.org/officeDocument/2006/relationships" xmlns:a="http://schemas.openxmlformats.org/drawingml/2006/main" r:embed="Rc2460140c0364b24">
+          <a:blip xmlns:r="http://schemas.openxmlformats.org/officeDocument/2006/relationships" xmlns:a="http://schemas.openxmlformats.org/drawingml/2006/main" r:embed="Ree0d0b57f6b74a90">
             <a:alphaModFix amt="28000"/>
           </a:blip>
           <a:stretch xmlns:a="http://schemas.openxmlformats.org/drawingml/2006/main"/>
@@ -3130,7 +3130,7 @@
           <p:nvPr/>
         </p:nvPicPr>
         <p:blipFill rotWithShape="1">
-          <a:blip xmlns:r="http://schemas.openxmlformats.org/officeDocument/2006/relationships" xmlns:a="http://schemas.openxmlformats.org/drawingml/2006/main" r:embed="R48e4ce39668149b3">
+          <a:blip xmlns:r="http://schemas.openxmlformats.org/officeDocument/2006/relationships" xmlns:a="http://schemas.openxmlformats.org/drawingml/2006/main" r:embed="Rf545955ee53f49f0">
             <a:alphaModFix amt="28000"/>
           </a:blip>
           <a:stretch xmlns:a="http://schemas.openxmlformats.org/drawingml/2006/main"/>
@@ -3457,7 +3457,7 @@
           <p:nvPr/>
         </p:nvPicPr>
         <p:blipFill rotWithShape="1">
-          <a:blip xmlns:r="http://schemas.openxmlformats.org/officeDocument/2006/relationships" xmlns:a="http://schemas.openxmlformats.org/drawingml/2006/main" r:embed="Ra88572b6d7214065">
+          <a:blip xmlns:r="http://schemas.openxmlformats.org/officeDocument/2006/relationships" xmlns:a="http://schemas.openxmlformats.org/drawingml/2006/main" r:embed="Rc5043f7fa8b247ae">
             <a:alphaModFix amt="28000"/>
           </a:blip>
           <a:stretch xmlns:a="http://schemas.openxmlformats.org/drawingml/2006/main"/>
@@ -3745,7 +3745,7 @@
           <p:nvPr/>
         </p:nvPicPr>
         <p:blipFill rotWithShape="1">
-          <a:blip xmlns:r="http://schemas.openxmlformats.org/officeDocument/2006/relationships" xmlns:a="http://schemas.openxmlformats.org/drawingml/2006/main" r:embed="R67a2168956c148da">
+          <a:blip xmlns:r="http://schemas.openxmlformats.org/officeDocument/2006/relationships" xmlns:a="http://schemas.openxmlformats.org/drawingml/2006/main" r:embed="R887437810de445c8">
             <a:alphaModFix amt="28000"/>
           </a:blip>
           <a:stretch xmlns:a="http://schemas.openxmlformats.org/drawingml/2006/main"/>
@@ -3982,17 +3982,17 @@
   </p:cSld>
   <p:clrMap bg1="lt1" tx1="dk1" bg2="lt2" tx2="dk2" accent1="accent1" accent2="accent2" accent3="accent3" accent4="accent4" accent5="accent5" accent6="accent6" hlink="hlink" folHlink="folHlink"/>
   <p:sldLayoutIdLst>
-    <p:sldLayoutId xmlns:r="http://schemas.openxmlformats.org/officeDocument/2006/relationships" id="2147483649" r:id="R004582fbb17c4635"/>
-    <p:sldLayoutId xmlns:r="http://schemas.openxmlformats.org/officeDocument/2006/relationships" id="2147483650" r:id="R35da679449824251"/>
-    <p:sldLayoutId xmlns:r="http://schemas.openxmlformats.org/officeDocument/2006/relationships" id="2147483651" r:id="R7431f412b8884489"/>
-    <p:sldLayoutId xmlns:r="http://schemas.openxmlformats.org/officeDocument/2006/relationships" id="2147483652" r:id="R395a85a25f7441d7"/>
-    <p:sldLayoutId xmlns:r="http://schemas.openxmlformats.org/officeDocument/2006/relationships" id="2147483653" r:id="R7cc5a3cae78143a6"/>
-    <p:sldLayoutId xmlns:r="http://schemas.openxmlformats.org/officeDocument/2006/relationships" id="2147483654" r:id="R08a4a8ea377e4732"/>
-    <p:sldLayoutId xmlns:r="http://schemas.openxmlformats.org/officeDocument/2006/relationships" id="2147483655" r:id="Rf59d630e17bc45a3"/>
-    <p:sldLayoutId xmlns:r="http://schemas.openxmlformats.org/officeDocument/2006/relationships" id="2147483656" r:id="R086e6b065ae34a36"/>
-    <p:sldLayoutId xmlns:r="http://schemas.openxmlformats.org/officeDocument/2006/relationships" id="2147483657" r:id="R63eaaa040fbb44c4"/>
-    <p:sldLayoutId xmlns:r="http://schemas.openxmlformats.org/officeDocument/2006/relationships" id="2147483658" r:id="R2abca8a5e43d4bed"/>
-    <p:sldLayoutId xmlns:r="http://schemas.openxmlformats.org/officeDocument/2006/relationships" id="2147483659" r:id="Re06e07aed0b04470"/>
+    <p:sldLayoutId xmlns:r="http://schemas.openxmlformats.org/officeDocument/2006/relationships" id="2147483649" r:id="R53cf3d9431dd40a0"/>
+    <p:sldLayoutId xmlns:r="http://schemas.openxmlformats.org/officeDocument/2006/relationships" id="2147483650" r:id="R3f5583bd21e24a67"/>
+    <p:sldLayoutId xmlns:r="http://schemas.openxmlformats.org/officeDocument/2006/relationships" id="2147483651" r:id="R6b8cda4077124a82"/>
+    <p:sldLayoutId xmlns:r="http://schemas.openxmlformats.org/officeDocument/2006/relationships" id="2147483652" r:id="Re02bff59bfad424e"/>
+    <p:sldLayoutId xmlns:r="http://schemas.openxmlformats.org/officeDocument/2006/relationships" id="2147483653" r:id="Rb2bebe6e8383496c"/>
+    <p:sldLayoutId xmlns:r="http://schemas.openxmlformats.org/officeDocument/2006/relationships" id="2147483654" r:id="R01ffb58b3ed74100"/>
+    <p:sldLayoutId xmlns:r="http://schemas.openxmlformats.org/officeDocument/2006/relationships" id="2147483655" r:id="Reac3cffea4824277"/>
+    <p:sldLayoutId xmlns:r="http://schemas.openxmlformats.org/officeDocument/2006/relationships" id="2147483656" r:id="Red51a21297e848ca"/>
+    <p:sldLayoutId xmlns:r="http://schemas.openxmlformats.org/officeDocument/2006/relationships" id="2147483657" r:id="R6f26457d82d94e45"/>
+    <p:sldLayoutId xmlns:r="http://schemas.openxmlformats.org/officeDocument/2006/relationships" id="2147483658" r:id="R07881615d5e144e5"/>
+    <p:sldLayoutId xmlns:r="http://schemas.openxmlformats.org/officeDocument/2006/relationships" id="2147483659" r:id="R5afcf784b7fc4924"/>
   </p:sldLayoutIdLst>
   <p:hf hdr="0" ftr="0" dt="0"/>
   <p:txStyles>
@@ -7505,7 +7505,117 @@
                 <a:ea typeface="Calibri"/>
                 <a:cs typeface="Calibri"/>
               </a:rPr>
-              <a:t>Make the counted warm-up display rounds 1 to 5. The condition-controlled section must still finish only when the user types done.</a:t>
+              <a:t>Change </a:t>
+            </a:r>
+            <a:r>
+              <a:rPr sz="2400" b="0">
+                <a:solidFill>
+                  <a:srgbClr val="1750EB"/>
+                </a:solidFill>
+                <a:latin typeface="JetBrains Mono"/>
+                <a:ea typeface="JetBrains Mono"/>
+                <a:cs typeface="JetBrains Mono"/>
+              </a:rPr>
+              <a:t>range()</a:t>
+            </a:r>
+            <a:r>
+              <a:rPr sz="2400" b="0">
+                <a:solidFill>
+                  <a:srgbClr val="080808"/>
+                </a:solidFill>
+                <a:latin typeface="Calibri"/>
+                <a:ea typeface="Calibri"/>
+                <a:cs typeface="Calibri"/>
+              </a:rPr>
+              <a:t> in the </a:t>
+            </a:r>
+            <a:r>
+              <a:rPr sz="2400" b="0">
+                <a:solidFill>
+                  <a:srgbClr val="1750EB"/>
+                </a:solidFill>
+                <a:latin typeface="JetBrains Mono"/>
+                <a:ea typeface="JetBrains Mono"/>
+                <a:cs typeface="JetBrains Mono"/>
+              </a:rPr>
+              <a:t>for</a:t>
+            </a:r>
+            <a:r>
+              <a:rPr sz="2400" b="0">
+                <a:solidFill>
+                  <a:srgbClr val="080808"/>
+                </a:solidFill>
+                <a:latin typeface="Calibri"/>
+                <a:ea typeface="Calibri"/>
+                <a:cs typeface="Calibri"/>
+              </a:rPr>
+              <a:t> loop so it displays warm-up rounds 1 through 5. Do not change the </a:t>
+            </a:r>
+            <a:r>
+              <a:rPr sz="2400" b="0">
+                <a:solidFill>
+                  <a:srgbClr val="1750EB"/>
+                </a:solidFill>
+                <a:latin typeface="JetBrains Mono"/>
+                <a:ea typeface="JetBrains Mono"/>
+                <a:cs typeface="JetBrains Mono"/>
+              </a:rPr>
+              <a:t>while</a:t>
+            </a:r>
+            <a:r>
+              <a:rPr sz="2400" b="0">
+                <a:solidFill>
+                  <a:srgbClr val="080808"/>
+                </a:solidFill>
+                <a:latin typeface="Calibri"/>
+                <a:ea typeface="Calibri"/>
+                <a:cs typeface="Calibri"/>
+              </a:rPr>
+              <a:t> loop; it must </a:t>
+            </a:r>
+            <a:r>
+              <a:rPr sz="2400" b="0">
+                <a:solidFill>
+                  <a:srgbClr val="1750EB"/>
+                </a:solidFill>
+                <a:latin typeface="JetBrains Mono"/>
+                <a:ea typeface="JetBrains Mono"/>
+                <a:cs typeface="JetBrains Mono"/>
+              </a:rPr>
+              <a:t>continue</a:t>
+            </a:r>
+            <a:r>
+              <a:rPr sz="2400" b="0">
+                <a:solidFill>
+                  <a:srgbClr val="080808"/>
+                </a:solidFill>
+                <a:latin typeface="Calibri"/>
+                <a:ea typeface="Calibri"/>
+                <a:cs typeface="Calibri"/>
+              </a:rPr>
+              <a:t> asking until the user enters </a:t>
+            </a:r>
+            <a:r>
+              <a:rPr sz="2400" b="0">
+                <a:solidFill>
+                  <a:srgbClr val="067D17"/>
+                </a:solidFill>
+                <a:latin typeface="JetBrains Mono"/>
+                <a:ea typeface="JetBrains Mono"/>
+                <a:cs typeface="JetBrains Mono"/>
+              </a:rPr>
+              <a:t>"done"</a:t>
+            </a:r>
+            <a:r>
+              <a:rPr sz="2400" b="0">
+                <a:solidFill>
+                  <a:srgbClr val="080808"/>
+                </a:solidFill>
+                <a:latin typeface="Calibri"/>
+                <a:ea typeface="Calibri"/>
+                <a:cs typeface="Calibri"/>
+              </a:rPr>
+              <a:t>.</a:t>
             </a:r>
           </a:p>
         </p:txBody>
@@ -8238,7 +8348,7 @@
                 <a:ea typeface="Calibri"/>
                 <a:cs typeface="Calibri"/>
               </a:rPr>
-              <a:t>Add an attempt counter to the </a:t>
+              <a:t>Create [counter] and store 0 in it before the </a:t>
             </a:r>
             <a:r>
               <a:rPr sz="2400" b="0">
@@ -8260,7 +8370,161 @@
                 <a:ea typeface="Calibri"/>
                 <a:cs typeface="Calibri"/>
               </a:rPr>
-              <a:t> loop. After done is entered, display the number of answers entered. For wait, wait, done the count must be 3.</a:t>
+              <a:t> loop. Add 1 to [counter] each time the user enters an answer, including </a:t>
+            </a:r>
+            <a:r>
+              <a:rPr sz="2400" b="0">
+                <a:solidFill>
+                  <a:srgbClr val="067D17"/>
+                </a:solidFill>
+                <a:latin typeface="JetBrains Mono"/>
+                <a:ea typeface="JetBrains Mono"/>
+                <a:cs typeface="JetBrains Mono"/>
+              </a:rPr>
+              <a:t>"done"</a:t>
+            </a:r>
+            <a:r>
+              <a:rPr sz="2400" b="0">
+                <a:solidFill>
+                  <a:srgbClr val="080808"/>
+                </a:solidFill>
+                <a:latin typeface="Calibri"/>
+                <a:ea typeface="Calibri"/>
+                <a:cs typeface="Calibri"/>
+              </a:rPr>
+              <a:t>. After </a:t>
+            </a:r>
+            <a:r>
+              <a:rPr sz="2400" b="0">
+                <a:solidFill>
+                  <a:srgbClr val="067D17"/>
+                </a:solidFill>
+                <a:latin typeface="JetBrains Mono"/>
+                <a:ea typeface="JetBrains Mono"/>
+                <a:cs typeface="JetBrains Mono"/>
+              </a:rPr>
+              <a:t>"done"</a:t>
+            </a:r>
+            <a:r>
+              <a:rPr sz="2400" b="0">
+                <a:solidFill>
+                  <a:srgbClr val="080808"/>
+                </a:solidFill>
+                <a:latin typeface="Calibri"/>
+                <a:ea typeface="Calibri"/>
+                <a:cs typeface="Calibri"/>
+              </a:rPr>
+              <a:t> is entered, display </a:t>
+            </a:r>
+            <a:r>
+              <a:rPr sz="2400" b="0">
+                <a:solidFill>
+                  <a:srgbClr val="067D17"/>
+                </a:solidFill>
+                <a:latin typeface="JetBrains Mono"/>
+                <a:ea typeface="JetBrains Mono"/>
+                <a:cs typeface="JetBrains Mono"/>
+              </a:rPr>
+              <a:t>"Answers entered:"</a:t>
+            </a:r>
+            <a:r>
+              <a:rPr sz="2400" b="0">
+                <a:solidFill>
+                  <a:srgbClr val="080808"/>
+                </a:solidFill>
+                <a:latin typeface="Calibri"/>
+                <a:ea typeface="Calibri"/>
+                <a:cs typeface="Calibri"/>
+              </a:rPr>
+              <a:t> followed by [counter]. Test </a:t>
+            </a:r>
+            <a:r>
+              <a:rPr sz="2400" b="0">
+                <a:solidFill>
+                  <a:srgbClr val="067D17"/>
+                </a:solidFill>
+                <a:latin typeface="JetBrains Mono"/>
+                <a:ea typeface="JetBrains Mono"/>
+                <a:cs typeface="JetBrains Mono"/>
+              </a:rPr>
+              <a:t>"wait"</a:t>
+            </a:r>
+            <a:r>
+              <a:rPr sz="2400" b="0">
+                <a:solidFill>
+                  <a:srgbClr val="080808"/>
+                </a:solidFill>
+                <a:latin typeface="Calibri"/>
+                <a:ea typeface="Calibri"/>
+                <a:cs typeface="Calibri"/>
+              </a:rPr>
+              <a:t>, </a:t>
+            </a:r>
+            <a:r>
+              <a:rPr sz="2400" b="0">
+                <a:solidFill>
+                  <a:srgbClr val="067D17"/>
+                </a:solidFill>
+                <a:latin typeface="JetBrains Mono"/>
+                <a:ea typeface="JetBrains Mono"/>
+                <a:cs typeface="JetBrains Mono"/>
+              </a:rPr>
+              <a:t>"wait"</a:t>
+            </a:r>
+            <a:r>
+              <a:rPr sz="2400" b="0">
+                <a:solidFill>
+                  <a:srgbClr val="080808"/>
+                </a:solidFill>
+                <a:latin typeface="Calibri"/>
+                <a:ea typeface="Calibri"/>
+                <a:cs typeface="Calibri"/>
+              </a:rPr>
+              <a:t>, then </a:t>
+            </a:r>
+            <a:r>
+              <a:rPr sz="2400" b="0">
+                <a:solidFill>
+                  <a:srgbClr val="067D17"/>
+                </a:solidFill>
+                <a:latin typeface="JetBrains Mono"/>
+                <a:ea typeface="JetBrains Mono"/>
+                <a:cs typeface="JetBrains Mono"/>
+              </a:rPr>
+              <a:t>"done"</a:t>
+            </a:r>
+            <a:r>
+              <a:rPr sz="2400" b="0">
+                <a:solidFill>
+                  <a:srgbClr val="080808"/>
+                </a:solidFill>
+                <a:latin typeface="Calibri"/>
+                <a:ea typeface="Calibri"/>
+                <a:cs typeface="Calibri"/>
+              </a:rPr>
+              <a:t>; display </a:t>
+            </a:r>
+            <a:r>
+              <a:rPr sz="2400" b="0">
+                <a:solidFill>
+                  <a:srgbClr val="067D17"/>
+                </a:solidFill>
+                <a:latin typeface="JetBrains Mono"/>
+                <a:ea typeface="JetBrains Mono"/>
+                <a:cs typeface="JetBrains Mono"/>
+              </a:rPr>
+              <a:t>"Answers entered: 3"</a:t>
+            </a:r>
+            <a:r>
+              <a:rPr sz="2400" b="0">
+                <a:solidFill>
+                  <a:srgbClr val="080808"/>
+                </a:solidFill>
+                <a:latin typeface="Calibri"/>
+                <a:ea typeface="Calibri"/>
+                <a:cs typeface="Calibri"/>
+              </a:rPr>
+              <a:t>.</a:t>
             </a:r>
           </a:p>
         </p:txBody>
@@ -8993,7 +9257,7 @@
                 <a:ea typeface="Calibri"/>
                 <a:cs typeface="Calibri"/>
               </a:rPr>
-              <a:t>Create a practice timer without real-time code. Use a </a:t>
+              <a:t>Use a </a:t>
             </a:r>
             <a:r>
               <a:rPr sz="2400" b="0">
@@ -9015,18 +9279,18 @@
                 <a:ea typeface="Calibri"/>
                 <a:cs typeface="Calibri"/>
               </a:rPr>
-              <a:t> loop to display exactly four exercise stations, then a </a:t>
+              <a:t> loop to display </a:t>
             </a:r>
             <a:r>
               <a:rPr sz="2400" b="0">
                 <a:solidFill>
-                  <a:srgbClr val="1750EB"/>
-                </a:solidFill>
-                <a:latin typeface="JetBrains Mono"/>
-                <a:ea typeface="JetBrains Mono"/>
-                <a:cs typeface="JetBrains Mono"/>
-              </a:rPr>
-              <a:t>while</a:t>
+                  <a:srgbClr val="067D17"/>
+                </a:solidFill>
+                <a:latin typeface="JetBrains Mono"/>
+                <a:ea typeface="JetBrains Mono"/>
+                <a:cs typeface="JetBrains Mono"/>
+              </a:rPr>
+              <a:t>"Exercise 1"</a:t>
             </a:r>
             <a:r>
               <a:rPr sz="2400" b="0">
@@ -9037,7 +9301,73 @@
                 <a:ea typeface="Calibri"/>
                 <a:cs typeface="Calibri"/>
               </a:rPr>
-              <a:t> loop to collect effort ratings until the user enters 0. Count and display the non-zero ratings.</a:t>
+              <a:t> through </a:t>
+            </a:r>
+            <a:r>
+              <a:rPr sz="2400" b="0">
+                <a:solidFill>
+                  <a:srgbClr val="067D17"/>
+                </a:solidFill>
+                <a:latin typeface="JetBrains Mono"/>
+                <a:ea typeface="JetBrains Mono"/>
+                <a:cs typeface="JetBrains Mono"/>
+              </a:rPr>
+              <a:t>"Exercise 4"</a:t>
+            </a:r>
+            <a:r>
+              <a:rPr sz="2400" b="0">
+                <a:solidFill>
+                  <a:srgbClr val="080808"/>
+                </a:solidFill>
+                <a:latin typeface="Calibri"/>
+                <a:ea typeface="Calibri"/>
+                <a:cs typeface="Calibri"/>
+              </a:rPr>
+              <a:t>. After those four lines, use a </a:t>
+            </a:r>
+            <a:r>
+              <a:rPr sz="2400" b="0">
+                <a:solidFill>
+                  <a:srgbClr val="1750EB"/>
+                </a:solidFill>
+                <a:latin typeface="JetBrains Mono"/>
+                <a:ea typeface="JetBrains Mono"/>
+                <a:cs typeface="JetBrains Mono"/>
+              </a:rPr>
+              <a:t>while</a:t>
+            </a:r>
+            <a:r>
+              <a:rPr sz="2400" b="0">
+                <a:solidFill>
+                  <a:srgbClr val="080808"/>
+                </a:solidFill>
+                <a:latin typeface="Calibri"/>
+                <a:ea typeface="Calibri"/>
+                <a:cs typeface="Calibri"/>
+              </a:rPr>
+              <a:t> loop to ask for whole-number effort scores until the user enters 0. Store the number of scores entered in [ratings], but do not count 0. Test 2, 3 and 0; display </a:t>
+            </a:r>
+            <a:r>
+              <a:rPr sz="2400" b="0">
+                <a:solidFill>
+                  <a:srgbClr val="067D17"/>
+                </a:solidFill>
+                <a:latin typeface="JetBrains Mono"/>
+                <a:ea typeface="JetBrains Mono"/>
+                <a:cs typeface="JetBrains Mono"/>
+              </a:rPr>
+              <a:t>"Scores entered: 2"</a:t>
+            </a:r>
+            <a:r>
+              <a:rPr sz="2400" b="0">
+                <a:solidFill>
+                  <a:srgbClr val="080808"/>
+                </a:solidFill>
+                <a:latin typeface="Calibri"/>
+                <a:ea typeface="Calibri"/>
+                <a:cs typeface="Calibri"/>
+              </a:rPr>
+              <a:t>.</a:t>
             </a:r>
           </a:p>
         </p:txBody>

--- a/Mapped Curriculum Lessons/Grade 6/Lesson 10 - Choosing Loop Structures/Choosing Loop Structures - Slides.pptx
+++ b/Mapped Curriculum Lessons/Grade 6/Lesson 10 - Choosing Loop Structures/Choosing Loop Structures - Slides.pptx
@@ -2,28 +2,28 @@
 <file path=ppt/presentation.xml><?xml version="1.0" encoding="utf-8"?>
 <p:presentation xmlns:p="http://schemas.openxmlformats.org/presentationml/2006/main" embedTrueTypeFonts="1" saveSubsetFonts="0">
   <p:sldMasterIdLst>
-    <p:sldMasterId xmlns:r="http://schemas.openxmlformats.org/officeDocument/2006/relationships" id="2147483648" r:id="Red69b22d65944f04"/>
+    <p:sldMasterId xmlns:r="http://schemas.openxmlformats.org/officeDocument/2006/relationships" id="2147483648" r:id="R572da8d246c04c27"/>
   </p:sldMasterIdLst>
   <p:notesMasterIdLst>
-    <p:notesMasterId xmlns:r="http://schemas.openxmlformats.org/officeDocument/2006/relationships" r:id="R727d9a93667a49cb"/>
+    <p:notesMasterId xmlns:r="http://schemas.openxmlformats.org/officeDocument/2006/relationships" r:id="R01189aa90b474917"/>
   </p:notesMasterIdLst>
   <p:sldIdLst>
-    <p:sldId xmlns:r="http://schemas.openxmlformats.org/officeDocument/2006/relationships" id="256" r:id="Raa27d317bf944179"/>
-    <p:sldId xmlns:r="http://schemas.openxmlformats.org/officeDocument/2006/relationships" id="257" r:id="R42e53ba2acec4c28"/>
-    <p:sldId xmlns:r="http://schemas.openxmlformats.org/officeDocument/2006/relationships" id="258" r:id="R7eb2b9c0bd184f6e"/>
-    <p:sldId xmlns:r="http://schemas.openxmlformats.org/officeDocument/2006/relationships" id="259" r:id="Ra6f147e267fe4be6"/>
-    <p:sldId xmlns:r="http://schemas.openxmlformats.org/officeDocument/2006/relationships" id="260" r:id="R0fc710591dda40b9"/>
-    <p:sldId xmlns:r="http://schemas.openxmlformats.org/officeDocument/2006/relationships" id="261" r:id="Re4012ad082be4890"/>
-    <p:sldId xmlns:r="http://schemas.openxmlformats.org/officeDocument/2006/relationships" id="262" r:id="Rcde118f83bbd4ffb"/>
-    <p:sldId xmlns:r="http://schemas.openxmlformats.org/officeDocument/2006/relationships" id="263" r:id="R369b5d11bb324e74"/>
-    <p:sldId xmlns:r="http://schemas.openxmlformats.org/officeDocument/2006/relationships" id="264" r:id="R290ddac947974187"/>
+    <p:sldId xmlns:r="http://schemas.openxmlformats.org/officeDocument/2006/relationships" id="256" r:id="Rfeed7be4b5554e06"/>
+    <p:sldId xmlns:r="http://schemas.openxmlformats.org/officeDocument/2006/relationships" id="257" r:id="R22de631aaa0f4696"/>
+    <p:sldId xmlns:r="http://schemas.openxmlformats.org/officeDocument/2006/relationships" id="258" r:id="Rc77cae8cde8a4684"/>
+    <p:sldId xmlns:r="http://schemas.openxmlformats.org/officeDocument/2006/relationships" id="259" r:id="R21a01c3a44e04ada"/>
+    <p:sldId xmlns:r="http://schemas.openxmlformats.org/officeDocument/2006/relationships" id="260" r:id="R543f8abcaeb54d64"/>
+    <p:sldId xmlns:r="http://schemas.openxmlformats.org/officeDocument/2006/relationships" id="261" r:id="Rab22dd56f8cf46d7"/>
+    <p:sldId xmlns:r="http://schemas.openxmlformats.org/officeDocument/2006/relationships" id="262" r:id="Rbb029d66140b4222"/>
+    <p:sldId xmlns:r="http://schemas.openxmlformats.org/officeDocument/2006/relationships" id="263" r:id="R29d118a1925c49cf"/>
+    <p:sldId xmlns:r="http://schemas.openxmlformats.org/officeDocument/2006/relationships" id="264" r:id="R23b9cce1154e4f2e"/>
   </p:sldIdLst>
   <p:sldSz cx="12192000" cy="6858000"/>
   <p:notesSz cx="6858000" cy="9144000"/>
   <p:embeddedFontLst>
     <p:embeddedFont>
       <p:font typeface="JetBrains Mono"/>
-      <p:regular xmlns:r="http://schemas.openxmlformats.org/officeDocument/2006/relationships" r:id="Rdb32a4a823ba4e2c"/>
+      <p:regular xmlns:r="http://schemas.openxmlformats.org/officeDocument/2006/relationships" r:id="Ra25735db372b4963"/>
     </p:embeddedFont>
   </p:embeddedFontLst>
 </p:presentation>
@@ -1071,7 +1071,7 @@
           <p:nvPr/>
         </p:nvPicPr>
         <p:blipFill rotWithShape="1">
-          <a:blip xmlns:r="http://schemas.openxmlformats.org/officeDocument/2006/relationships" xmlns:a="http://schemas.openxmlformats.org/drawingml/2006/main" r:embed="Ra59a41ff2efc44b5"/>
+          <a:blip xmlns:r="http://schemas.openxmlformats.org/officeDocument/2006/relationships" xmlns:a="http://schemas.openxmlformats.org/drawingml/2006/main" r:embed="R5e8dee66b86e4785"/>
           <a:stretch xmlns:a="http://schemas.openxmlformats.org/drawingml/2006/main"/>
         </p:blipFill>
         <p:spPr>
@@ -1451,7 +1451,7 @@
           <p:nvPr/>
         </p:nvPicPr>
         <p:blipFill rotWithShape="1">
-          <a:blip xmlns:r="http://schemas.openxmlformats.org/officeDocument/2006/relationships" xmlns:a="http://schemas.openxmlformats.org/drawingml/2006/main" r:embed="R6a5ca5fc38fd4527">
+          <a:blip xmlns:r="http://schemas.openxmlformats.org/officeDocument/2006/relationships" xmlns:a="http://schemas.openxmlformats.org/drawingml/2006/main" r:embed="R04024ee37f544705">
             <a:alphaModFix amt="28000"/>
           </a:blip>
           <a:stretch xmlns:a="http://schemas.openxmlformats.org/drawingml/2006/main"/>
@@ -1664,7 +1664,7 @@
           <p:nvPr/>
         </p:nvPicPr>
         <p:blipFill rotWithShape="1">
-          <a:blip xmlns:r="http://schemas.openxmlformats.org/officeDocument/2006/relationships" xmlns:a="http://schemas.openxmlformats.org/drawingml/2006/main" r:embed="R37e9fd90d29f4176">
+          <a:blip xmlns:r="http://schemas.openxmlformats.org/officeDocument/2006/relationships" xmlns:a="http://schemas.openxmlformats.org/drawingml/2006/main" r:embed="Rf2171f72aa974b7e">
             <a:alphaModFix amt="28000"/>
           </a:blip>
           <a:stretch xmlns:a="http://schemas.openxmlformats.org/drawingml/2006/main"/>
@@ -1899,7 +1899,7 @@
           <p:nvPr/>
         </p:nvPicPr>
         <p:blipFill rotWithShape="1">
-          <a:blip xmlns:r="http://schemas.openxmlformats.org/officeDocument/2006/relationships" xmlns:a="http://schemas.openxmlformats.org/drawingml/2006/main" r:embed="Rd19f0299a80d438c">
+          <a:blip xmlns:r="http://schemas.openxmlformats.org/officeDocument/2006/relationships" xmlns:a="http://schemas.openxmlformats.org/drawingml/2006/main" r:embed="Rb7f9082f03cc476b">
             <a:alphaModFix amt="28000"/>
           </a:blip>
           <a:stretch xmlns:a="http://schemas.openxmlformats.org/drawingml/2006/main"/>
@@ -2176,7 +2176,7 @@
           <p:nvPr/>
         </p:nvPicPr>
         <p:blipFill rotWithShape="1">
-          <a:blip xmlns:r="http://schemas.openxmlformats.org/officeDocument/2006/relationships" xmlns:a="http://schemas.openxmlformats.org/drawingml/2006/main" r:embed="Rbd775698b0614170">
+          <a:blip xmlns:r="http://schemas.openxmlformats.org/officeDocument/2006/relationships" xmlns:a="http://schemas.openxmlformats.org/drawingml/2006/main" r:embed="R4aa7f1e2371943fd">
             <a:alphaModFix amt="28000"/>
           </a:blip>
           <a:stretch xmlns:a="http://schemas.openxmlformats.org/drawingml/2006/main"/>
@@ -2451,7 +2451,7 @@
           <p:nvPr/>
         </p:nvPicPr>
         <p:blipFill rotWithShape="1">
-          <a:blip xmlns:r="http://schemas.openxmlformats.org/officeDocument/2006/relationships" xmlns:a="http://schemas.openxmlformats.org/drawingml/2006/main" r:embed="Rd8c30b3fe4d6453d">
+          <a:blip xmlns:r="http://schemas.openxmlformats.org/officeDocument/2006/relationships" xmlns:a="http://schemas.openxmlformats.org/drawingml/2006/main" r:embed="R1dc08a3b5af140c0">
             <a:alphaModFix amt="28000"/>
           </a:blip>
           <a:stretch xmlns:a="http://schemas.openxmlformats.org/drawingml/2006/main"/>
@@ -2875,7 +2875,7 @@
           <p:nvPr/>
         </p:nvPicPr>
         <p:blipFill rotWithShape="1">
-          <a:blip xmlns:r="http://schemas.openxmlformats.org/officeDocument/2006/relationships" xmlns:a="http://schemas.openxmlformats.org/drawingml/2006/main" r:embed="Reb245b348cb6489f">
+          <a:blip xmlns:r="http://schemas.openxmlformats.org/officeDocument/2006/relationships" xmlns:a="http://schemas.openxmlformats.org/drawingml/2006/main" r:embed="R089412ab383d497c">
             <a:alphaModFix amt="28000"/>
           </a:blip>
           <a:stretch xmlns:a="http://schemas.openxmlformats.org/drawingml/2006/main"/>
@@ -3016,7 +3016,7 @@
           <p:nvPr/>
         </p:nvPicPr>
         <p:blipFill rotWithShape="1">
-          <a:blip xmlns:r="http://schemas.openxmlformats.org/officeDocument/2006/relationships" xmlns:a="http://schemas.openxmlformats.org/drawingml/2006/main" r:embed="Ree0d0b57f6b74a90">
+          <a:blip xmlns:r="http://schemas.openxmlformats.org/officeDocument/2006/relationships" xmlns:a="http://schemas.openxmlformats.org/drawingml/2006/main" r:embed="Rc1a00bb162a44978">
             <a:alphaModFix amt="28000"/>
           </a:blip>
           <a:stretch xmlns:a="http://schemas.openxmlformats.org/drawingml/2006/main"/>
@@ -3130,7 +3130,7 @@
           <p:nvPr/>
         </p:nvPicPr>
         <p:blipFill rotWithShape="1">
-          <a:blip xmlns:r="http://schemas.openxmlformats.org/officeDocument/2006/relationships" xmlns:a="http://schemas.openxmlformats.org/drawingml/2006/main" r:embed="Rf545955ee53f49f0">
+          <a:blip xmlns:r="http://schemas.openxmlformats.org/officeDocument/2006/relationships" xmlns:a="http://schemas.openxmlformats.org/drawingml/2006/main" r:embed="Rea4d12c24a3647a7">
             <a:alphaModFix amt="28000"/>
           </a:blip>
           <a:stretch xmlns:a="http://schemas.openxmlformats.org/drawingml/2006/main"/>
@@ -3457,7 +3457,7 @@
           <p:nvPr/>
         </p:nvPicPr>
         <p:blipFill rotWithShape="1">
-          <a:blip xmlns:r="http://schemas.openxmlformats.org/officeDocument/2006/relationships" xmlns:a="http://schemas.openxmlformats.org/drawingml/2006/main" r:embed="Rc5043f7fa8b247ae">
+          <a:blip xmlns:r="http://schemas.openxmlformats.org/officeDocument/2006/relationships" xmlns:a="http://schemas.openxmlformats.org/drawingml/2006/main" r:embed="R9adbe7de8bf04837">
             <a:alphaModFix amt="28000"/>
           </a:blip>
           <a:stretch xmlns:a="http://schemas.openxmlformats.org/drawingml/2006/main"/>
@@ -3745,7 +3745,7 @@
           <p:nvPr/>
         </p:nvPicPr>
         <p:blipFill rotWithShape="1">
-          <a:blip xmlns:r="http://schemas.openxmlformats.org/officeDocument/2006/relationships" xmlns:a="http://schemas.openxmlformats.org/drawingml/2006/main" r:embed="R887437810de445c8">
+          <a:blip xmlns:r="http://schemas.openxmlformats.org/officeDocument/2006/relationships" xmlns:a="http://schemas.openxmlformats.org/drawingml/2006/main" r:embed="R4069612e50194213">
             <a:alphaModFix amt="28000"/>
           </a:blip>
           <a:stretch xmlns:a="http://schemas.openxmlformats.org/drawingml/2006/main"/>
@@ -3982,17 +3982,17 @@
   </p:cSld>
   <p:clrMap bg1="lt1" tx1="dk1" bg2="lt2" tx2="dk2" accent1="accent1" accent2="accent2" accent3="accent3" accent4="accent4" accent5="accent5" accent6="accent6" hlink="hlink" folHlink="folHlink"/>
   <p:sldLayoutIdLst>
-    <p:sldLayoutId xmlns:r="http://schemas.openxmlformats.org/officeDocument/2006/relationships" id="2147483649" r:id="R53cf3d9431dd40a0"/>
-    <p:sldLayoutId xmlns:r="http://schemas.openxmlformats.org/officeDocument/2006/relationships" id="2147483650" r:id="R3f5583bd21e24a67"/>
-    <p:sldLayoutId xmlns:r="http://schemas.openxmlformats.org/officeDocument/2006/relationships" id="2147483651" r:id="R6b8cda4077124a82"/>
-    <p:sldLayoutId xmlns:r="http://schemas.openxmlformats.org/officeDocument/2006/relationships" id="2147483652" r:id="Re02bff59bfad424e"/>
-    <p:sldLayoutId xmlns:r="http://schemas.openxmlformats.org/officeDocument/2006/relationships" id="2147483653" r:id="Rb2bebe6e8383496c"/>
-    <p:sldLayoutId xmlns:r="http://schemas.openxmlformats.org/officeDocument/2006/relationships" id="2147483654" r:id="R01ffb58b3ed74100"/>
-    <p:sldLayoutId xmlns:r="http://schemas.openxmlformats.org/officeDocument/2006/relationships" id="2147483655" r:id="Reac3cffea4824277"/>
-    <p:sldLayoutId xmlns:r="http://schemas.openxmlformats.org/officeDocument/2006/relationships" id="2147483656" r:id="Red51a21297e848ca"/>
-    <p:sldLayoutId xmlns:r="http://schemas.openxmlformats.org/officeDocument/2006/relationships" id="2147483657" r:id="R6f26457d82d94e45"/>
-    <p:sldLayoutId xmlns:r="http://schemas.openxmlformats.org/officeDocument/2006/relationships" id="2147483658" r:id="R07881615d5e144e5"/>
-    <p:sldLayoutId xmlns:r="http://schemas.openxmlformats.org/officeDocument/2006/relationships" id="2147483659" r:id="R5afcf784b7fc4924"/>
+    <p:sldLayoutId xmlns:r="http://schemas.openxmlformats.org/officeDocument/2006/relationships" id="2147483649" r:id="R6ea4e6d46156449b"/>
+    <p:sldLayoutId xmlns:r="http://schemas.openxmlformats.org/officeDocument/2006/relationships" id="2147483650" r:id="Rb8c7c8c4e8c541cc"/>
+    <p:sldLayoutId xmlns:r="http://schemas.openxmlformats.org/officeDocument/2006/relationships" id="2147483651" r:id="R07c45c67b0ff49fd"/>
+    <p:sldLayoutId xmlns:r="http://schemas.openxmlformats.org/officeDocument/2006/relationships" id="2147483652" r:id="Rbc015859e8d24095"/>
+    <p:sldLayoutId xmlns:r="http://schemas.openxmlformats.org/officeDocument/2006/relationships" id="2147483653" r:id="Rd283c33b4dc84124"/>
+    <p:sldLayoutId xmlns:r="http://schemas.openxmlformats.org/officeDocument/2006/relationships" id="2147483654" r:id="Rba8ef33b3ce94590"/>
+    <p:sldLayoutId xmlns:r="http://schemas.openxmlformats.org/officeDocument/2006/relationships" id="2147483655" r:id="R3a862752d58d481c"/>
+    <p:sldLayoutId xmlns:r="http://schemas.openxmlformats.org/officeDocument/2006/relationships" id="2147483656" r:id="Rb4eaf21c556c4d3c"/>
+    <p:sldLayoutId xmlns:r="http://schemas.openxmlformats.org/officeDocument/2006/relationships" id="2147483657" r:id="R9dd0c1297c624919"/>
+    <p:sldLayoutId xmlns:r="http://schemas.openxmlformats.org/officeDocument/2006/relationships" id="2147483658" r:id="R543bd6150b2b4d9a"/>
+    <p:sldLayoutId xmlns:r="http://schemas.openxmlformats.org/officeDocument/2006/relationships" id="2147483659" r:id="R12b6cd986ac44216"/>
   </p:sldLayoutIdLst>
   <p:hf hdr="0" ftr="0" dt="0"/>
   <p:txStyles>
@@ -7505,18 +7505,21 @@
                 <a:ea typeface="Calibri"/>
                 <a:cs typeface="Calibri"/>
               </a:rPr>
-              <a:t>Change </a:t>
-            </a:r>
-            <a:r>
-              <a:rPr sz="2400" b="0">
-                <a:solidFill>
-                  <a:srgbClr val="1750EB"/>
-                </a:solidFill>
-                <a:latin typeface="JetBrains Mono"/>
-                <a:ea typeface="JetBrains Mono"/>
-                <a:cs typeface="JetBrains Mono"/>
-              </a:rPr>
-              <a:t>range()</a:t>
+              <a:t>Change the example so it first asks how many warm-up rounds to show and stores the whole number in </a:t>
+            </a:r>
+            <a:r>
+              <a:rPr sz="2050" b="0">
+                <a:solidFill>
+                  <a:srgbClr val="6A1B9A"/>
+                </a:solidFill>
+                <a:highlight>
+                  <a:srgbClr val="ECEAF4"/>
+                </a:highlight>
+                <a:latin typeface="JetBrains Mono"/>
+                <a:ea typeface="JetBrains Mono"/>
+                <a:cs typeface="JetBrains Mono"/>
+              </a:rPr>
+              <a:t> rounds </a:t>
             </a:r>
             <a:r>
               <a:rPr sz="2400" b="0">
@@ -7527,18 +7530,21 @@
                 <a:ea typeface="Calibri"/>
                 <a:cs typeface="Calibri"/>
               </a:rPr>
-              <a:t> in the </a:t>
-            </a:r>
-            <a:r>
-              <a:rPr sz="2400" b="0">
-                <a:solidFill>
-                  <a:srgbClr val="1750EB"/>
-                </a:solidFill>
-                <a:latin typeface="JetBrains Mono"/>
-                <a:ea typeface="JetBrains Mono"/>
-                <a:cs typeface="JetBrains Mono"/>
-              </a:rPr>
-              <a:t>for</a:t>
+              <a:t>. Use </a:t>
+            </a:r>
+            <a:r>
+              <a:rPr sz="2050" b="0">
+                <a:solidFill>
+                  <a:srgbClr val="6A1B9A"/>
+                </a:solidFill>
+                <a:highlight>
+                  <a:srgbClr val="ECEAF4"/>
+                </a:highlight>
+                <a:latin typeface="JetBrains Mono"/>
+                <a:ea typeface="JetBrains Mono"/>
+                <a:cs typeface="JetBrains Mono"/>
+              </a:rPr>
+              <a:t> rounds </a:t>
             </a:r>
             <a:r>
               <a:rPr sz="2400" b="0">
@@ -7549,10 +7555,10 @@
                 <a:ea typeface="Calibri"/>
                 <a:cs typeface="Calibri"/>
               </a:rPr>
-              <a:t> loop so it displays warm-up rounds 1 through 5. Do not change the </a:t>
-            </a:r>
-            <a:r>
-              <a:rPr sz="2400" b="0">
+              <a:t> in </a:t>
+            </a:r>
+            <a:r>
+              <a:rPr sz="2050" b="0">
                 <a:solidFill>
                   <a:srgbClr val="1750EB"/>
                 </a:solidFill>
@@ -7560,7 +7566,7 @@
                 <a:ea typeface="JetBrains Mono"/>
                 <a:cs typeface="JetBrains Mono"/>
               </a:rPr>
-              <a:t>while</a:t>
+              <a:t>range()</a:t>
             </a:r>
             <a:r>
               <a:rPr sz="2400" b="0">
@@ -7571,10 +7577,10 @@
                 <a:ea typeface="Calibri"/>
                 <a:cs typeface="Calibri"/>
               </a:rPr>
-              <a:t> loop; it must </a:t>
-            </a:r>
-            <a:r>
-              <a:rPr sz="2400" b="0">
+              <a:t> so the </a:t>
+            </a:r>
+            <a:r>
+              <a:rPr sz="2050" b="0">
                 <a:solidFill>
                   <a:srgbClr val="1750EB"/>
                 </a:solidFill>
@@ -7582,7 +7588,7 @@
                 <a:ea typeface="JetBrains Mono"/>
                 <a:cs typeface="JetBrains Mono"/>
               </a:rPr>
-              <a:t>continue</a:t>
+              <a:t>for</a:t>
             </a:r>
             <a:r>
               <a:rPr sz="2400" b="0">
@@ -7593,10 +7599,32 @@
                 <a:ea typeface="Calibri"/>
                 <a:cs typeface="Calibri"/>
               </a:rPr>
-              <a:t> asking until the user enters </a:t>
+              <a:t> loop shows that many rounds. The </a:t>
+            </a:r>
+            <a:r>
+              <a:rPr sz="2050" b="0">
+                <a:solidFill>
+                  <a:srgbClr val="1750EB"/>
+                </a:solidFill>
+                <a:latin typeface="JetBrains Mono"/>
+                <a:ea typeface="JetBrains Mono"/>
+                <a:cs typeface="JetBrains Mono"/>
+              </a:rPr>
+              <a:t>while</a:t>
             </a:r>
             <a:r>
               <a:rPr sz="2400" b="0">
+                <a:solidFill>
+                  <a:srgbClr val="080808"/>
+                </a:solidFill>
+                <a:latin typeface="Calibri"/>
+                <a:ea typeface="Calibri"/>
+                <a:cs typeface="Calibri"/>
+              </a:rPr>
+              <a:t> loop should still end when the user types </a:t>
+            </a:r>
+            <a:r>
+              <a:rPr sz="2050" b="0">
                 <a:solidFill>
                   <a:srgbClr val="067D17"/>
                 </a:solidFill>
@@ -8348,10 +8376,10 @@
                 <a:ea typeface="Calibri"/>
                 <a:cs typeface="Calibri"/>
               </a:rPr>
-              <a:t>Create [counter] and store 0 in it before the </a:t>
-            </a:r>
-            <a:r>
-              <a:rPr sz="2400" b="0">
+              <a:t>Extend the example so the </a:t>
+            </a:r>
+            <a:r>
+              <a:rPr sz="2050" b="0">
                 <a:solidFill>
                   <a:srgbClr val="1750EB"/>
                 </a:solidFill>
@@ -8370,18 +8398,21 @@
                 <a:ea typeface="Calibri"/>
                 <a:cs typeface="Calibri"/>
               </a:rPr>
-              <a:t> loop. Add 1 to [counter] each time the user enters an answer, including </a:t>
-            </a:r>
-            <a:r>
-              <a:rPr sz="2400" b="0">
-                <a:solidFill>
-                  <a:srgbClr val="067D17"/>
-                </a:solidFill>
-                <a:latin typeface="JetBrains Mono"/>
-                <a:ea typeface="JetBrains Mono"/>
-                <a:cs typeface="JetBrains Mono"/>
-              </a:rPr>
-              <a:t>"done"</a:t>
+              <a:t> loop counts every answer in </a:t>
+            </a:r>
+            <a:r>
+              <a:rPr sz="2050" b="0">
+                <a:solidFill>
+                  <a:srgbClr val="6A1B9A"/>
+                </a:solidFill>
+                <a:highlight>
+                  <a:srgbClr val="ECEAF4"/>
+                </a:highlight>
+                <a:latin typeface="JetBrains Mono"/>
+                <a:ea typeface="JetBrains Mono"/>
+                <a:cs typeface="JetBrains Mono"/>
+              </a:rPr>
+              <a:t> counter </a:t>
             </a:r>
             <a:r>
               <a:rPr sz="2400" b="0">
@@ -8392,10 +8423,10 @@
                 <a:ea typeface="Calibri"/>
                 <a:cs typeface="Calibri"/>
               </a:rPr>
-              <a:t>. After </a:t>
-            </a:r>
-            <a:r>
-              <a:rPr sz="2400" b="0">
+              <a:t>, including </a:t>
+            </a:r>
+            <a:r>
+              <a:rPr sz="2050" b="0">
                 <a:solidFill>
                   <a:srgbClr val="067D17"/>
                 </a:solidFill>
@@ -8414,10 +8445,10 @@
                 <a:ea typeface="Calibri"/>
                 <a:cs typeface="Calibri"/>
               </a:rPr>
-              <a:t> is entered, display </a:t>
-            </a:r>
-            <a:r>
-              <a:rPr sz="2400" b="0">
+              <a:t>. After the loop, display </a:t>
+            </a:r>
+            <a:r>
+              <a:rPr sz="2050" b="0">
                 <a:solidFill>
                   <a:srgbClr val="067D17"/>
                 </a:solidFill>
@@ -8436,18 +8467,21 @@
                 <a:ea typeface="Calibri"/>
                 <a:cs typeface="Calibri"/>
               </a:rPr>
-              <a:t> followed by [counter]. Test </a:t>
-            </a:r>
-            <a:r>
-              <a:rPr sz="2400" b="0">
-                <a:solidFill>
-                  <a:srgbClr val="067D17"/>
-                </a:solidFill>
-                <a:latin typeface="JetBrains Mono"/>
-                <a:ea typeface="JetBrains Mono"/>
-                <a:cs typeface="JetBrains Mono"/>
-              </a:rPr>
-              <a:t>"wait"</a:t>
+              <a:t> followed by </a:t>
+            </a:r>
+            <a:r>
+              <a:rPr sz="2050" b="0">
+                <a:solidFill>
+                  <a:srgbClr val="6A1B9A"/>
+                </a:solidFill>
+                <a:highlight>
+                  <a:srgbClr val="ECEAF4"/>
+                </a:highlight>
+                <a:latin typeface="JetBrains Mono"/>
+                <a:ea typeface="JetBrains Mono"/>
+                <a:cs typeface="JetBrains Mono"/>
+              </a:rPr>
+              <a:t> counter </a:t>
             </a:r>
             <a:r>
               <a:rPr sz="2400" b="0">
@@ -8458,10 +8492,10 @@
                 <a:ea typeface="Calibri"/>
                 <a:cs typeface="Calibri"/>
               </a:rPr>
-              <a:t>, </a:t>
-            </a:r>
-            <a:r>
-              <a:rPr sz="2400" b="0">
+              <a:t>. For example, </a:t>
+            </a:r>
+            <a:r>
+              <a:rPr sz="2050" b="0">
                 <a:solidFill>
                   <a:srgbClr val="067D17"/>
                 </a:solidFill>
@@ -8480,10 +8514,10 @@
                 <a:ea typeface="Calibri"/>
                 <a:cs typeface="Calibri"/>
               </a:rPr>
-              <a:t>, then </a:t>
-            </a:r>
-            <a:r>
-              <a:rPr sz="2400" b="0">
+              <a:t>, </a:t>
+            </a:r>
+            <a:r>
+              <a:rPr sz="2050" b="0">
                 <a:solidFill>
                   <a:srgbClr val="067D17"/>
                 </a:solidFill>
@@ -8491,7 +8525,7 @@
                 <a:ea typeface="JetBrains Mono"/>
                 <a:cs typeface="JetBrains Mono"/>
               </a:rPr>
-              <a:t>"done"</a:t>
+              <a:t>"wait"</a:t>
             </a:r>
             <a:r>
               <a:rPr sz="2400" b="0">
@@ -8502,10 +8536,32 @@
                 <a:ea typeface="Calibri"/>
                 <a:cs typeface="Calibri"/>
               </a:rPr>
-              <a:t>; display </a:t>
+              <a:t> and </a:t>
+            </a:r>
+            <a:r>
+              <a:rPr sz="2050" b="0">
+                <a:solidFill>
+                  <a:srgbClr val="067D17"/>
+                </a:solidFill>
+                <a:latin typeface="JetBrains Mono"/>
+                <a:ea typeface="JetBrains Mono"/>
+                <a:cs typeface="JetBrains Mono"/>
+              </a:rPr>
+              <a:t>"done"</a:t>
             </a:r>
             <a:r>
               <a:rPr sz="2400" b="0">
+                <a:solidFill>
+                  <a:srgbClr val="080808"/>
+                </a:solidFill>
+                <a:latin typeface="Calibri"/>
+                <a:ea typeface="Calibri"/>
+                <a:cs typeface="Calibri"/>
+              </a:rPr>
+              <a:t> display </a:t>
+            </a:r>
+            <a:r>
+              <a:rPr sz="2050" b="0">
                 <a:solidFill>
                   <a:srgbClr val="067D17"/>
                 </a:solidFill>
@@ -9257,10 +9313,10 @@
                 <a:ea typeface="Calibri"/>
                 <a:cs typeface="Calibri"/>
               </a:rPr>
-              <a:t>Use a </a:t>
-            </a:r>
-            <a:r>
-              <a:rPr sz="2400" b="0">
+              <a:t>Create a training program. Use a </a:t>
+            </a:r>
+            <a:r>
+              <a:rPr sz="2050" b="0">
                 <a:solidFill>
                   <a:srgbClr val="1750EB"/>
                 </a:solidFill>
@@ -9282,7 +9338,7 @@
               <a:t> loop to display </a:t>
             </a:r>
             <a:r>
-              <a:rPr sz="2400" b="0">
+              <a:rPr sz="2050" b="0">
                 <a:solidFill>
                   <a:srgbClr val="067D17"/>
                 </a:solidFill>
@@ -9301,10 +9357,10 @@
                 <a:ea typeface="Calibri"/>
                 <a:cs typeface="Calibri"/>
               </a:rPr>
-              <a:t> through </a:t>
-            </a:r>
-            <a:r>
-              <a:rPr sz="2400" b="0">
+              <a:t> to </a:t>
+            </a:r>
+            <a:r>
+              <a:rPr sz="2050" b="0">
                 <a:solidFill>
                   <a:srgbClr val="067D17"/>
                 </a:solidFill>
@@ -9323,10 +9379,10 @@
                 <a:ea typeface="Calibri"/>
                 <a:cs typeface="Calibri"/>
               </a:rPr>
-              <a:t>. After those four lines, use a </a:t>
-            </a:r>
-            <a:r>
-              <a:rPr sz="2400" b="0">
+              <a:t>. Then use a </a:t>
+            </a:r>
+            <a:r>
+              <a:rPr sz="2050" b="0">
                 <a:solidFill>
                   <a:srgbClr val="1750EB"/>
                 </a:solidFill>
@@ -9345,10 +9401,10 @@
                 <a:ea typeface="Calibri"/>
                 <a:cs typeface="Calibri"/>
               </a:rPr>
-              <a:t> loop to ask for whole-number effort scores until the user enters 0. Store the number of scores entered in [ratings], but do not count 0. Test 2, 3 and 0; display </a:t>
-            </a:r>
-            <a:r>
-              <a:rPr sz="2400" b="0">
+              <a:t> loop to ask for whole-number effort scores until the user enters 0. Count every score except 0 and display </a:t>
+            </a:r>
+            <a:r>
+              <a:rPr sz="2050" b="0">
                 <a:solidFill>
                   <a:srgbClr val="067D17"/>
                 </a:solidFill>
@@ -9356,7 +9412,7 @@
                 <a:ea typeface="JetBrains Mono"/>
                 <a:cs typeface="JetBrains Mono"/>
               </a:rPr>
-              <a:t>"Scores entered: 2"</a:t>
+              <a:t>"Scores entered:"</a:t>
             </a:r>
             <a:r>
               <a:rPr sz="2400" b="0">
@@ -9367,7 +9423,7 @@
                 <a:ea typeface="Calibri"/>
                 <a:cs typeface="Calibri"/>
               </a:rPr>
-              <a:t>.</a:t>
+              <a:t> with the count.</a:t>
             </a:r>
           </a:p>
         </p:txBody>

--- a/Mapped Curriculum Lessons/Grade 6/Lesson 10 - Choosing Loop Structures/Choosing Loop Structures - Slides.pptx
+++ b/Mapped Curriculum Lessons/Grade 6/Lesson 10 - Choosing Loop Structures/Choosing Loop Structures - Slides.pptx
@@ -2,28 +2,28 @@
 <file path=ppt/presentation.xml><?xml version="1.0" encoding="utf-8"?>
 <p:presentation xmlns:p="http://schemas.openxmlformats.org/presentationml/2006/main" embedTrueTypeFonts="1" saveSubsetFonts="0">
   <p:sldMasterIdLst>
-    <p:sldMasterId xmlns:r="http://schemas.openxmlformats.org/officeDocument/2006/relationships" id="2147483648" r:id="R572da8d246c04c27"/>
+    <p:sldMasterId xmlns:r="http://schemas.openxmlformats.org/officeDocument/2006/relationships" id="2147483648" r:id="Rc952ef9ca3fb4b81"/>
   </p:sldMasterIdLst>
   <p:notesMasterIdLst>
-    <p:notesMasterId xmlns:r="http://schemas.openxmlformats.org/officeDocument/2006/relationships" r:id="R01189aa90b474917"/>
+    <p:notesMasterId xmlns:r="http://schemas.openxmlformats.org/officeDocument/2006/relationships" r:id="Rb4f4749652f6448a"/>
   </p:notesMasterIdLst>
   <p:sldIdLst>
-    <p:sldId xmlns:r="http://schemas.openxmlformats.org/officeDocument/2006/relationships" id="256" r:id="Rfeed7be4b5554e06"/>
-    <p:sldId xmlns:r="http://schemas.openxmlformats.org/officeDocument/2006/relationships" id="257" r:id="R22de631aaa0f4696"/>
-    <p:sldId xmlns:r="http://schemas.openxmlformats.org/officeDocument/2006/relationships" id="258" r:id="Rc77cae8cde8a4684"/>
-    <p:sldId xmlns:r="http://schemas.openxmlformats.org/officeDocument/2006/relationships" id="259" r:id="R21a01c3a44e04ada"/>
-    <p:sldId xmlns:r="http://schemas.openxmlformats.org/officeDocument/2006/relationships" id="260" r:id="R543f8abcaeb54d64"/>
-    <p:sldId xmlns:r="http://schemas.openxmlformats.org/officeDocument/2006/relationships" id="261" r:id="Rab22dd56f8cf46d7"/>
-    <p:sldId xmlns:r="http://schemas.openxmlformats.org/officeDocument/2006/relationships" id="262" r:id="Rbb029d66140b4222"/>
-    <p:sldId xmlns:r="http://schemas.openxmlformats.org/officeDocument/2006/relationships" id="263" r:id="R29d118a1925c49cf"/>
-    <p:sldId xmlns:r="http://schemas.openxmlformats.org/officeDocument/2006/relationships" id="264" r:id="R23b9cce1154e4f2e"/>
+    <p:sldId xmlns:r="http://schemas.openxmlformats.org/officeDocument/2006/relationships" id="256" r:id="R8eaaaad47fc94d16"/>
+    <p:sldId xmlns:r="http://schemas.openxmlformats.org/officeDocument/2006/relationships" id="257" r:id="R42bee28c6a834eff"/>
+    <p:sldId xmlns:r="http://schemas.openxmlformats.org/officeDocument/2006/relationships" id="258" r:id="R3dd85e758d334277"/>
+    <p:sldId xmlns:r="http://schemas.openxmlformats.org/officeDocument/2006/relationships" id="259" r:id="Rbecee20862ff42be"/>
+    <p:sldId xmlns:r="http://schemas.openxmlformats.org/officeDocument/2006/relationships" id="260" r:id="Rfefb7a8288de4f1b"/>
+    <p:sldId xmlns:r="http://schemas.openxmlformats.org/officeDocument/2006/relationships" id="261" r:id="Ra32e03e4c62547c8"/>
+    <p:sldId xmlns:r="http://schemas.openxmlformats.org/officeDocument/2006/relationships" id="262" r:id="Rec74457eaa9647fe"/>
+    <p:sldId xmlns:r="http://schemas.openxmlformats.org/officeDocument/2006/relationships" id="263" r:id="R76e3be5242474097"/>
+    <p:sldId xmlns:r="http://schemas.openxmlformats.org/officeDocument/2006/relationships" id="264" r:id="R05b7febd86dc4b2d"/>
   </p:sldIdLst>
   <p:sldSz cx="12192000" cy="6858000"/>
   <p:notesSz cx="6858000" cy="9144000"/>
   <p:embeddedFontLst>
     <p:embeddedFont>
       <p:font typeface="JetBrains Mono"/>
-      <p:regular xmlns:r="http://schemas.openxmlformats.org/officeDocument/2006/relationships" r:id="Ra25735db372b4963"/>
+      <p:regular xmlns:r="http://schemas.openxmlformats.org/officeDocument/2006/relationships" r:id="R74a159c583704016"/>
     </p:embeddedFont>
   </p:embeddedFontLst>
 </p:presentation>
@@ -1071,7 +1071,7 @@
           <p:nvPr/>
         </p:nvPicPr>
         <p:blipFill rotWithShape="1">
-          <a:blip xmlns:r="http://schemas.openxmlformats.org/officeDocument/2006/relationships" xmlns:a="http://schemas.openxmlformats.org/drawingml/2006/main" r:embed="R5e8dee66b86e4785"/>
+          <a:blip xmlns:r="http://schemas.openxmlformats.org/officeDocument/2006/relationships" xmlns:a="http://schemas.openxmlformats.org/drawingml/2006/main" r:embed="R824034d385fc45e2"/>
           <a:stretch xmlns:a="http://schemas.openxmlformats.org/drawingml/2006/main"/>
         </p:blipFill>
         <p:spPr>
@@ -1451,7 +1451,7 @@
           <p:nvPr/>
         </p:nvPicPr>
         <p:blipFill rotWithShape="1">
-          <a:blip xmlns:r="http://schemas.openxmlformats.org/officeDocument/2006/relationships" xmlns:a="http://schemas.openxmlformats.org/drawingml/2006/main" r:embed="R04024ee37f544705">
+          <a:blip xmlns:r="http://schemas.openxmlformats.org/officeDocument/2006/relationships" xmlns:a="http://schemas.openxmlformats.org/drawingml/2006/main" r:embed="R9458abae58d14e2b">
             <a:alphaModFix amt="28000"/>
           </a:blip>
           <a:stretch xmlns:a="http://schemas.openxmlformats.org/drawingml/2006/main"/>
@@ -1664,7 +1664,7 @@
           <p:nvPr/>
         </p:nvPicPr>
         <p:blipFill rotWithShape="1">
-          <a:blip xmlns:r="http://schemas.openxmlformats.org/officeDocument/2006/relationships" xmlns:a="http://schemas.openxmlformats.org/drawingml/2006/main" r:embed="Rf2171f72aa974b7e">
+          <a:blip xmlns:r="http://schemas.openxmlformats.org/officeDocument/2006/relationships" xmlns:a="http://schemas.openxmlformats.org/drawingml/2006/main" r:embed="Ra8ab8760364f41fc">
             <a:alphaModFix amt="28000"/>
           </a:blip>
           <a:stretch xmlns:a="http://schemas.openxmlformats.org/drawingml/2006/main"/>
@@ -1899,7 +1899,7 @@
           <p:nvPr/>
         </p:nvPicPr>
         <p:blipFill rotWithShape="1">
-          <a:blip xmlns:r="http://schemas.openxmlformats.org/officeDocument/2006/relationships" xmlns:a="http://schemas.openxmlformats.org/drawingml/2006/main" r:embed="Rb7f9082f03cc476b">
+          <a:blip xmlns:r="http://schemas.openxmlformats.org/officeDocument/2006/relationships" xmlns:a="http://schemas.openxmlformats.org/drawingml/2006/main" r:embed="Rd06c09cd22b1434a">
             <a:alphaModFix amt="28000"/>
           </a:blip>
           <a:stretch xmlns:a="http://schemas.openxmlformats.org/drawingml/2006/main"/>
@@ -2176,7 +2176,7 @@
           <p:nvPr/>
         </p:nvPicPr>
         <p:blipFill rotWithShape="1">
-          <a:blip xmlns:r="http://schemas.openxmlformats.org/officeDocument/2006/relationships" xmlns:a="http://schemas.openxmlformats.org/drawingml/2006/main" r:embed="R4aa7f1e2371943fd">
+          <a:blip xmlns:r="http://schemas.openxmlformats.org/officeDocument/2006/relationships" xmlns:a="http://schemas.openxmlformats.org/drawingml/2006/main" r:embed="R53e5235e169d47b6">
             <a:alphaModFix amt="28000"/>
           </a:blip>
           <a:stretch xmlns:a="http://schemas.openxmlformats.org/drawingml/2006/main"/>
@@ -2451,7 +2451,7 @@
           <p:nvPr/>
         </p:nvPicPr>
         <p:blipFill rotWithShape="1">
-          <a:blip xmlns:r="http://schemas.openxmlformats.org/officeDocument/2006/relationships" xmlns:a="http://schemas.openxmlformats.org/drawingml/2006/main" r:embed="R1dc08a3b5af140c0">
+          <a:blip xmlns:r="http://schemas.openxmlformats.org/officeDocument/2006/relationships" xmlns:a="http://schemas.openxmlformats.org/drawingml/2006/main" r:embed="Rb4382b0184194efd">
             <a:alphaModFix amt="28000"/>
           </a:blip>
           <a:stretch xmlns:a="http://schemas.openxmlformats.org/drawingml/2006/main"/>
@@ -2875,7 +2875,7 @@
           <p:nvPr/>
         </p:nvPicPr>
         <p:blipFill rotWithShape="1">
-          <a:blip xmlns:r="http://schemas.openxmlformats.org/officeDocument/2006/relationships" xmlns:a="http://schemas.openxmlformats.org/drawingml/2006/main" r:embed="R089412ab383d497c">
+          <a:blip xmlns:r="http://schemas.openxmlformats.org/officeDocument/2006/relationships" xmlns:a="http://schemas.openxmlformats.org/drawingml/2006/main" r:embed="R0ccd1121ea0d4c64">
             <a:alphaModFix amt="28000"/>
           </a:blip>
           <a:stretch xmlns:a="http://schemas.openxmlformats.org/drawingml/2006/main"/>
@@ -3016,7 +3016,7 @@
           <p:nvPr/>
         </p:nvPicPr>
         <p:blipFill rotWithShape="1">
-          <a:blip xmlns:r="http://schemas.openxmlformats.org/officeDocument/2006/relationships" xmlns:a="http://schemas.openxmlformats.org/drawingml/2006/main" r:embed="Rc1a00bb162a44978">
+          <a:blip xmlns:r="http://schemas.openxmlformats.org/officeDocument/2006/relationships" xmlns:a="http://schemas.openxmlformats.org/drawingml/2006/main" r:embed="Rbb608547bdd7401e">
             <a:alphaModFix amt="28000"/>
           </a:blip>
           <a:stretch xmlns:a="http://schemas.openxmlformats.org/drawingml/2006/main"/>
@@ -3130,7 +3130,7 @@
           <p:nvPr/>
         </p:nvPicPr>
         <p:blipFill rotWithShape="1">
-          <a:blip xmlns:r="http://schemas.openxmlformats.org/officeDocument/2006/relationships" xmlns:a="http://schemas.openxmlformats.org/drawingml/2006/main" r:embed="Rea4d12c24a3647a7">
+          <a:blip xmlns:r="http://schemas.openxmlformats.org/officeDocument/2006/relationships" xmlns:a="http://schemas.openxmlformats.org/drawingml/2006/main" r:embed="R6531fd554ed54c2c">
             <a:alphaModFix amt="28000"/>
           </a:blip>
           <a:stretch xmlns:a="http://schemas.openxmlformats.org/drawingml/2006/main"/>
@@ -3457,7 +3457,7 @@
           <p:nvPr/>
         </p:nvPicPr>
         <p:blipFill rotWithShape="1">
-          <a:blip xmlns:r="http://schemas.openxmlformats.org/officeDocument/2006/relationships" xmlns:a="http://schemas.openxmlformats.org/drawingml/2006/main" r:embed="R9adbe7de8bf04837">
+          <a:blip xmlns:r="http://schemas.openxmlformats.org/officeDocument/2006/relationships" xmlns:a="http://schemas.openxmlformats.org/drawingml/2006/main" r:embed="Rb28e246e3ce04faa">
             <a:alphaModFix amt="28000"/>
           </a:blip>
           <a:stretch xmlns:a="http://schemas.openxmlformats.org/drawingml/2006/main"/>
@@ -3745,7 +3745,7 @@
           <p:nvPr/>
         </p:nvPicPr>
         <p:blipFill rotWithShape="1">
-          <a:blip xmlns:r="http://schemas.openxmlformats.org/officeDocument/2006/relationships" xmlns:a="http://schemas.openxmlformats.org/drawingml/2006/main" r:embed="R4069612e50194213">
+          <a:blip xmlns:r="http://schemas.openxmlformats.org/officeDocument/2006/relationships" xmlns:a="http://schemas.openxmlformats.org/drawingml/2006/main" r:embed="R6ac421c4d304476f">
             <a:alphaModFix amt="28000"/>
           </a:blip>
           <a:stretch xmlns:a="http://schemas.openxmlformats.org/drawingml/2006/main"/>
@@ -3982,17 +3982,17 @@
   </p:cSld>
   <p:clrMap bg1="lt1" tx1="dk1" bg2="lt2" tx2="dk2" accent1="accent1" accent2="accent2" accent3="accent3" accent4="accent4" accent5="accent5" accent6="accent6" hlink="hlink" folHlink="folHlink"/>
   <p:sldLayoutIdLst>
-    <p:sldLayoutId xmlns:r="http://schemas.openxmlformats.org/officeDocument/2006/relationships" id="2147483649" r:id="R6ea4e6d46156449b"/>
-    <p:sldLayoutId xmlns:r="http://schemas.openxmlformats.org/officeDocument/2006/relationships" id="2147483650" r:id="Rb8c7c8c4e8c541cc"/>
-    <p:sldLayoutId xmlns:r="http://schemas.openxmlformats.org/officeDocument/2006/relationships" id="2147483651" r:id="R07c45c67b0ff49fd"/>
-    <p:sldLayoutId xmlns:r="http://schemas.openxmlformats.org/officeDocument/2006/relationships" id="2147483652" r:id="Rbc015859e8d24095"/>
-    <p:sldLayoutId xmlns:r="http://schemas.openxmlformats.org/officeDocument/2006/relationships" id="2147483653" r:id="Rd283c33b4dc84124"/>
-    <p:sldLayoutId xmlns:r="http://schemas.openxmlformats.org/officeDocument/2006/relationships" id="2147483654" r:id="Rba8ef33b3ce94590"/>
-    <p:sldLayoutId xmlns:r="http://schemas.openxmlformats.org/officeDocument/2006/relationships" id="2147483655" r:id="R3a862752d58d481c"/>
-    <p:sldLayoutId xmlns:r="http://schemas.openxmlformats.org/officeDocument/2006/relationships" id="2147483656" r:id="Rb4eaf21c556c4d3c"/>
-    <p:sldLayoutId xmlns:r="http://schemas.openxmlformats.org/officeDocument/2006/relationships" id="2147483657" r:id="R9dd0c1297c624919"/>
-    <p:sldLayoutId xmlns:r="http://schemas.openxmlformats.org/officeDocument/2006/relationships" id="2147483658" r:id="R543bd6150b2b4d9a"/>
-    <p:sldLayoutId xmlns:r="http://schemas.openxmlformats.org/officeDocument/2006/relationships" id="2147483659" r:id="R12b6cd986ac44216"/>
+    <p:sldLayoutId xmlns:r="http://schemas.openxmlformats.org/officeDocument/2006/relationships" id="2147483649" r:id="Rbb170f70adc74591"/>
+    <p:sldLayoutId xmlns:r="http://schemas.openxmlformats.org/officeDocument/2006/relationships" id="2147483650" r:id="R22615e5f86434224"/>
+    <p:sldLayoutId xmlns:r="http://schemas.openxmlformats.org/officeDocument/2006/relationships" id="2147483651" r:id="R160824cbbcc64608"/>
+    <p:sldLayoutId xmlns:r="http://schemas.openxmlformats.org/officeDocument/2006/relationships" id="2147483652" r:id="R45e3a19a5ce7474b"/>
+    <p:sldLayoutId xmlns:r="http://schemas.openxmlformats.org/officeDocument/2006/relationships" id="2147483653" r:id="Rb8eede6114c04df0"/>
+    <p:sldLayoutId xmlns:r="http://schemas.openxmlformats.org/officeDocument/2006/relationships" id="2147483654" r:id="Rb62bdac3d4f04527"/>
+    <p:sldLayoutId xmlns:r="http://schemas.openxmlformats.org/officeDocument/2006/relationships" id="2147483655" r:id="R1b9c6ff2d6e54ba3"/>
+    <p:sldLayoutId xmlns:r="http://schemas.openxmlformats.org/officeDocument/2006/relationships" id="2147483656" r:id="R74c1973a93144844"/>
+    <p:sldLayoutId xmlns:r="http://schemas.openxmlformats.org/officeDocument/2006/relationships" id="2147483657" r:id="Rb91d41a5994d4eea"/>
+    <p:sldLayoutId xmlns:r="http://schemas.openxmlformats.org/officeDocument/2006/relationships" id="2147483658" r:id="R20789913d24c471f"/>
+    <p:sldLayoutId xmlns:r="http://schemas.openxmlformats.org/officeDocument/2006/relationships" id="2147483659" r:id="Rf8c3bc0937fc4faa"/>
   </p:sldLayoutIdLst>
   <p:hf hdr="0" ftr="0" dt="0"/>
   <p:txStyles>
@@ -4898,7 +4898,7 @@
             <a:r>
               <a:rPr sz="2400">
                 <a:solidFill>
-                  <a:srgbClr val="1750EB"/>
+                  <a:srgbClr val="C45E00"/>
                 </a:solidFill>
                 <a:latin typeface="JetBrains Mono"/>
                 <a:ea typeface="JetBrains Mono"/>
@@ -4920,7 +4920,7 @@
             <a:r>
               <a:rPr sz="2400">
                 <a:solidFill>
-                  <a:srgbClr val="1750EB"/>
+                  <a:srgbClr val="C45E00"/>
                 </a:solidFill>
                 <a:latin typeface="JetBrains Mono"/>
                 <a:ea typeface="JetBrains Mono"/>
@@ -5065,7 +5065,7 @@
             <a:r>
               <a:rPr sz="2400">
                 <a:solidFill>
-                  <a:srgbClr val="1750EB"/>
+                  <a:srgbClr val="C45E00"/>
                 </a:solidFill>
                 <a:latin typeface="JetBrains Mono"/>
                 <a:ea typeface="JetBrains Mono"/>
@@ -5531,7 +5531,7 @@
             <a:r>
               <a:rPr sz="2400">
                 <a:solidFill>
-                  <a:srgbClr val="1750EB"/>
+                  <a:srgbClr val="C45E00"/>
                 </a:solidFill>
                 <a:latin typeface="JetBrains Mono"/>
                 <a:ea typeface="JetBrains Mono"/>
@@ -5553,7 +5553,7 @@
             <a:r>
               <a:rPr sz="2400">
                 <a:solidFill>
-                  <a:srgbClr val="1750EB"/>
+                  <a:srgbClr val="C45E00"/>
                 </a:solidFill>
                 <a:latin typeface="JetBrains Mono"/>
                 <a:ea typeface="JetBrains Mono"/>
@@ -5698,7 +5698,7 @@
             <a:r>
               <a:rPr sz="2400">
                 <a:solidFill>
-                  <a:srgbClr val="1750EB"/>
+                  <a:srgbClr val="C45E00"/>
                 </a:solidFill>
                 <a:latin typeface="JetBrains Mono"/>
                 <a:ea typeface="JetBrains Mono"/>
@@ -6164,7 +6164,7 @@
             <a:r>
               <a:rPr sz="2400">
                 <a:solidFill>
-                  <a:srgbClr val="1750EB"/>
+                  <a:srgbClr val="C45E00"/>
                 </a:solidFill>
                 <a:latin typeface="JetBrains Mono"/>
                 <a:ea typeface="JetBrains Mono"/>
@@ -6186,7 +6186,7 @@
             <a:r>
               <a:rPr sz="2400">
                 <a:solidFill>
-                  <a:srgbClr val="1750EB"/>
+                  <a:srgbClr val="C45E00"/>
                 </a:solidFill>
                 <a:latin typeface="JetBrains Mono"/>
                 <a:ea typeface="JetBrains Mono"/>
@@ -6331,7 +6331,7 @@
             <a:r>
               <a:rPr sz="2400">
                 <a:solidFill>
-                  <a:srgbClr val="1750EB"/>
+                  <a:srgbClr val="C45E00"/>
                 </a:solidFill>
                 <a:latin typeface="JetBrains Mono"/>
                 <a:ea typeface="JetBrains Mono"/>
@@ -7048,24 +7048,89 @@
             <a:r>
               <a:rPr sz="1400">
                 <a:solidFill>
+                  <a:srgbClr val="C45E00"/>
+                </a:solidFill>
+                <a:latin typeface="JetBrains Mono"/>
+                <a:ea typeface="JetBrains Mono"/>
+                <a:cs typeface="JetBrains Mono"/>
+              </a:rPr>
+              <a:t>for</a:t>
+            </a:r>
+            <a:r>
+              <a:rPr sz="1400">
+                <a:solidFill>
+                  <a:srgbClr val="080808"/>
+                </a:solidFill>
+                <a:latin typeface="JetBrains Mono"/>
+                <a:ea typeface="JetBrains Mono"/>
+                <a:cs typeface="JetBrains Mono"/>
+              </a:rPr>
+              <a:t> round_number </a:t>
+            </a:r>
+            <a:r>
+              <a:rPr sz="1400">
+                <a:solidFill>
+                  <a:srgbClr val="C45E00"/>
+                </a:solidFill>
+                <a:latin typeface="JetBrains Mono"/>
+                <a:ea typeface="JetBrains Mono"/>
+                <a:cs typeface="JetBrains Mono"/>
+              </a:rPr>
+              <a:t>in</a:t>
+            </a:r>
+            <a:r>
+              <a:rPr sz="1400">
+                <a:solidFill>
+                  <a:srgbClr val="080808"/>
+                </a:solidFill>
+                <a:latin typeface="JetBrains Mono"/>
+                <a:ea typeface="JetBrains Mono"/>
+                <a:cs typeface="JetBrains Mono"/>
+              </a:rPr>
+              <a:t> </a:t>
+            </a:r>
+            <a:r>
+              <a:rPr sz="1400">
+                <a:solidFill>
                   <a:srgbClr val="1750EB"/>
                 </a:solidFill>
                 <a:latin typeface="JetBrains Mono"/>
                 <a:ea typeface="JetBrains Mono"/>
                 <a:cs typeface="JetBrains Mono"/>
               </a:rPr>
-              <a:t>for</a:t>
-            </a:r>
-            <a:r>
-              <a:rPr sz="1400">
-                <a:solidFill>
-                  <a:srgbClr val="080808"/>
-                </a:solidFill>
-                <a:latin typeface="JetBrains Mono"/>
-                <a:ea typeface="JetBrains Mono"/>
-                <a:cs typeface="JetBrains Mono"/>
-              </a:rPr>
-              <a:t> round_number </a:t>
+              <a:t>range</a:t>
+            </a:r>
+            <a:r>
+              <a:rPr sz="1400">
+                <a:solidFill>
+                  <a:srgbClr val="080808"/>
+                </a:solidFill>
+                <a:latin typeface="JetBrains Mono"/>
+                <a:ea typeface="JetBrains Mono"/>
+                <a:cs typeface="JetBrains Mono"/>
+              </a:rPr>
+              <a:t>(1, 4):</a:t>
+            </a:r>
+            <a:br>
+              <a:rPr sz="1400">
+                <a:solidFill>
+                  <a:srgbClr val="080808"/>
+                </a:solidFill>
+                <a:latin typeface="JetBrains Mono"/>
+                <a:ea typeface="JetBrains Mono"/>
+                <a:cs typeface="JetBrains Mono"/>
+              </a:rPr>
+            </a:br>
+            <a:r>
+              <a:rPr sz="1400">
+                <a:solidFill>
+                  <a:srgbClr val="080808"/>
+                </a:solidFill>
+                <a:latin typeface="JetBrains Mono"/>
+                <a:ea typeface="JetBrains Mono"/>
+                <a:cs typeface="JetBrains Mono"/>
+              </a:rPr>
+              <a:t>    </a:t>
             </a:r>
             <a:r>
               <a:rPr sz="1400">
@@ -7076,40 +7141,40 @@
                 <a:ea typeface="JetBrains Mono"/>
                 <a:cs typeface="JetBrains Mono"/>
               </a:rPr>
-              <a:t>in</a:t>
-            </a:r>
-            <a:r>
-              <a:rPr sz="1400">
-                <a:solidFill>
-                  <a:srgbClr val="080808"/>
-                </a:solidFill>
-                <a:latin typeface="JetBrains Mono"/>
-                <a:ea typeface="JetBrains Mono"/>
-                <a:cs typeface="JetBrains Mono"/>
-              </a:rPr>
-              <a:t> </a:t>
-            </a:r>
-            <a:r>
-              <a:rPr sz="1400">
-                <a:solidFill>
-                  <a:srgbClr val="1750EB"/>
-                </a:solidFill>
-                <a:latin typeface="JetBrains Mono"/>
-                <a:ea typeface="JetBrains Mono"/>
-                <a:cs typeface="JetBrains Mono"/>
-              </a:rPr>
-              <a:t>range</a:t>
-            </a:r>
-            <a:r>
-              <a:rPr sz="1400">
-                <a:solidFill>
-                  <a:srgbClr val="080808"/>
-                </a:solidFill>
-                <a:latin typeface="JetBrains Mono"/>
-                <a:ea typeface="JetBrains Mono"/>
-                <a:cs typeface="JetBrains Mono"/>
-              </a:rPr>
-              <a:t>(1, 4):</a:t>
+              <a:t>print</a:t>
+            </a:r>
+            <a:r>
+              <a:rPr sz="1400">
+                <a:solidFill>
+                  <a:srgbClr val="080808"/>
+                </a:solidFill>
+                <a:latin typeface="JetBrains Mono"/>
+                <a:ea typeface="JetBrains Mono"/>
+                <a:cs typeface="JetBrains Mono"/>
+              </a:rPr>
+              <a:t>(</a:t>
+            </a:r>
+            <a:r>
+              <a:rPr sz="1400">
+                <a:solidFill>
+                  <a:srgbClr val="067D17"/>
+                </a:solidFill>
+                <a:latin typeface="JetBrains Mono"/>
+                <a:ea typeface="JetBrains Mono"/>
+                <a:cs typeface="JetBrains Mono"/>
+              </a:rPr>
+              <a:t>"Warm-up round"</a:t>
+            </a:r>
+            <a:r>
+              <a:rPr sz="1400">
+                <a:solidFill>
+                  <a:srgbClr val="080808"/>
+                </a:solidFill>
+                <a:latin typeface="JetBrains Mono"/>
+                <a:ea typeface="JetBrains Mono"/>
+                <a:cs typeface="JetBrains Mono"/>
+              </a:rPr>
+              <a:t>, round_number)</a:t>
             </a:r>
             <a:br>
               <a:rPr sz="1400">
@@ -7130,29 +7195,7 @@
                 <a:ea typeface="JetBrains Mono"/>
                 <a:cs typeface="JetBrains Mono"/>
               </a:rPr>
-              <a:t>    </a:t>
-            </a:r>
-            <a:r>
-              <a:rPr sz="1400">
-                <a:solidFill>
-                  <a:srgbClr val="1750EB"/>
-                </a:solidFill>
-                <a:latin typeface="JetBrains Mono"/>
-                <a:ea typeface="JetBrains Mono"/>
-                <a:cs typeface="JetBrains Mono"/>
-              </a:rPr>
-              <a:t>print</a:t>
-            </a:r>
-            <a:r>
-              <a:rPr sz="1400">
-                <a:solidFill>
-                  <a:srgbClr val="080808"/>
-                </a:solidFill>
-                <a:latin typeface="JetBrains Mono"/>
-                <a:ea typeface="JetBrains Mono"/>
-                <a:cs typeface="JetBrains Mono"/>
-              </a:rPr>
-              <a:t>(</a:t>
+              <a:t>answer = </a:t>
             </a:r>
             <a:r>
               <a:rPr sz="1400">
@@ -7163,18 +7206,7 @@
                 <a:ea typeface="JetBrains Mono"/>
                 <a:cs typeface="JetBrains Mono"/>
               </a:rPr>
-              <a:t>"Warm-up round"</a:t>
-            </a:r>
-            <a:r>
-              <a:rPr sz="1400">
-                <a:solidFill>
-                  <a:srgbClr val="080808"/>
-                </a:solidFill>
-                <a:latin typeface="JetBrains Mono"/>
-                <a:ea typeface="JetBrains Mono"/>
-                <a:cs typeface="JetBrains Mono"/>
-              </a:rPr>
-              <a:t>, round_number)</a:t>
+              <a:t>""</a:t>
             </a:r>
             <a:br>
               <a:rPr sz="1400">
@@ -7189,39 +7221,7 @@
             <a:r>
               <a:rPr sz="1400">
                 <a:solidFill>
-                  <a:srgbClr val="080808"/>
-                </a:solidFill>
-                <a:latin typeface="JetBrains Mono"/>
-                <a:ea typeface="JetBrains Mono"/>
-                <a:cs typeface="JetBrains Mono"/>
-              </a:rPr>
-              <a:t>answer = </a:t>
-            </a:r>
-            <a:r>
-              <a:rPr sz="1400">
-                <a:solidFill>
-                  <a:srgbClr val="067D17"/>
-                </a:solidFill>
-                <a:latin typeface="JetBrains Mono"/>
-                <a:ea typeface="JetBrains Mono"/>
-                <a:cs typeface="JetBrains Mono"/>
-              </a:rPr>
-              <a:t>""</a:t>
-            </a:r>
-            <a:br>
-              <a:rPr sz="1400">
-                <a:solidFill>
-                  <a:srgbClr val="080808"/>
-                </a:solidFill>
-                <a:latin typeface="JetBrains Mono"/>
-                <a:ea typeface="JetBrains Mono"/>
-                <a:cs typeface="JetBrains Mono"/>
-              </a:rPr>
-            </a:br>
-            <a:r>
-              <a:rPr sz="1400">
-                <a:solidFill>
-                  <a:srgbClr val="1750EB"/>
+                  <a:srgbClr val="C45E00"/>
                 </a:solidFill>
                 <a:latin typeface="JetBrains Mono"/>
                 <a:ea typeface="JetBrains Mono"/>
@@ -7582,7 +7582,7 @@
             <a:r>
               <a:rPr sz="2050" b="0">
                 <a:solidFill>
-                  <a:srgbClr val="1750EB"/>
+                  <a:srgbClr val="C45E00"/>
                 </a:solidFill>
                 <a:latin typeface="JetBrains Mono"/>
                 <a:ea typeface="JetBrains Mono"/>
@@ -7604,7 +7604,7 @@
             <a:r>
               <a:rPr sz="2050" b="0">
                 <a:solidFill>
-                  <a:srgbClr val="1750EB"/>
+                  <a:srgbClr val="C45E00"/>
                 </a:solidFill>
                 <a:latin typeface="JetBrains Mono"/>
                 <a:ea typeface="JetBrains Mono"/>
@@ -7919,24 +7919,89 @@
             <a:r>
               <a:rPr sz="1400">
                 <a:solidFill>
+                  <a:srgbClr val="C45E00"/>
+                </a:solidFill>
+                <a:latin typeface="JetBrains Mono"/>
+                <a:ea typeface="JetBrains Mono"/>
+                <a:cs typeface="JetBrains Mono"/>
+              </a:rPr>
+              <a:t>for</a:t>
+            </a:r>
+            <a:r>
+              <a:rPr sz="1400">
+                <a:solidFill>
+                  <a:srgbClr val="080808"/>
+                </a:solidFill>
+                <a:latin typeface="JetBrains Mono"/>
+                <a:ea typeface="JetBrains Mono"/>
+                <a:cs typeface="JetBrains Mono"/>
+              </a:rPr>
+              <a:t> round_number </a:t>
+            </a:r>
+            <a:r>
+              <a:rPr sz="1400">
+                <a:solidFill>
+                  <a:srgbClr val="C45E00"/>
+                </a:solidFill>
+                <a:latin typeface="JetBrains Mono"/>
+                <a:ea typeface="JetBrains Mono"/>
+                <a:cs typeface="JetBrains Mono"/>
+              </a:rPr>
+              <a:t>in</a:t>
+            </a:r>
+            <a:r>
+              <a:rPr sz="1400">
+                <a:solidFill>
+                  <a:srgbClr val="080808"/>
+                </a:solidFill>
+                <a:latin typeface="JetBrains Mono"/>
+                <a:ea typeface="JetBrains Mono"/>
+                <a:cs typeface="JetBrains Mono"/>
+              </a:rPr>
+              <a:t> </a:t>
+            </a:r>
+            <a:r>
+              <a:rPr sz="1400">
+                <a:solidFill>
                   <a:srgbClr val="1750EB"/>
                 </a:solidFill>
                 <a:latin typeface="JetBrains Mono"/>
                 <a:ea typeface="JetBrains Mono"/>
                 <a:cs typeface="JetBrains Mono"/>
               </a:rPr>
-              <a:t>for</a:t>
-            </a:r>
-            <a:r>
-              <a:rPr sz="1400">
-                <a:solidFill>
-                  <a:srgbClr val="080808"/>
-                </a:solidFill>
-                <a:latin typeface="JetBrains Mono"/>
-                <a:ea typeface="JetBrains Mono"/>
-                <a:cs typeface="JetBrains Mono"/>
-              </a:rPr>
-              <a:t> round_number </a:t>
+              <a:t>range</a:t>
+            </a:r>
+            <a:r>
+              <a:rPr sz="1400">
+                <a:solidFill>
+                  <a:srgbClr val="080808"/>
+                </a:solidFill>
+                <a:latin typeface="JetBrains Mono"/>
+                <a:ea typeface="JetBrains Mono"/>
+                <a:cs typeface="JetBrains Mono"/>
+              </a:rPr>
+              <a:t>(1, 4):</a:t>
+            </a:r>
+            <a:br>
+              <a:rPr sz="1400">
+                <a:solidFill>
+                  <a:srgbClr val="080808"/>
+                </a:solidFill>
+                <a:latin typeface="JetBrains Mono"/>
+                <a:ea typeface="JetBrains Mono"/>
+                <a:cs typeface="JetBrains Mono"/>
+              </a:rPr>
+            </a:br>
+            <a:r>
+              <a:rPr sz="1400">
+                <a:solidFill>
+                  <a:srgbClr val="080808"/>
+                </a:solidFill>
+                <a:latin typeface="JetBrains Mono"/>
+                <a:ea typeface="JetBrains Mono"/>
+                <a:cs typeface="JetBrains Mono"/>
+              </a:rPr>
+              <a:t>    </a:t>
             </a:r>
             <a:r>
               <a:rPr sz="1400">
@@ -7947,40 +8012,40 @@
                 <a:ea typeface="JetBrains Mono"/>
                 <a:cs typeface="JetBrains Mono"/>
               </a:rPr>
-              <a:t>in</a:t>
-            </a:r>
-            <a:r>
-              <a:rPr sz="1400">
-                <a:solidFill>
-                  <a:srgbClr val="080808"/>
-                </a:solidFill>
-                <a:latin typeface="JetBrains Mono"/>
-                <a:ea typeface="JetBrains Mono"/>
-                <a:cs typeface="JetBrains Mono"/>
-              </a:rPr>
-              <a:t> </a:t>
-            </a:r>
-            <a:r>
-              <a:rPr sz="1400">
-                <a:solidFill>
-                  <a:srgbClr val="1750EB"/>
-                </a:solidFill>
-                <a:latin typeface="JetBrains Mono"/>
-                <a:ea typeface="JetBrains Mono"/>
-                <a:cs typeface="JetBrains Mono"/>
-              </a:rPr>
-              <a:t>range</a:t>
-            </a:r>
-            <a:r>
-              <a:rPr sz="1400">
-                <a:solidFill>
-                  <a:srgbClr val="080808"/>
-                </a:solidFill>
-                <a:latin typeface="JetBrains Mono"/>
-                <a:ea typeface="JetBrains Mono"/>
-                <a:cs typeface="JetBrains Mono"/>
-              </a:rPr>
-              <a:t>(1, 4):</a:t>
+              <a:t>print</a:t>
+            </a:r>
+            <a:r>
+              <a:rPr sz="1400">
+                <a:solidFill>
+                  <a:srgbClr val="080808"/>
+                </a:solidFill>
+                <a:latin typeface="JetBrains Mono"/>
+                <a:ea typeface="JetBrains Mono"/>
+                <a:cs typeface="JetBrains Mono"/>
+              </a:rPr>
+              <a:t>(</a:t>
+            </a:r>
+            <a:r>
+              <a:rPr sz="1400">
+                <a:solidFill>
+                  <a:srgbClr val="067D17"/>
+                </a:solidFill>
+                <a:latin typeface="JetBrains Mono"/>
+                <a:ea typeface="JetBrains Mono"/>
+                <a:cs typeface="JetBrains Mono"/>
+              </a:rPr>
+              <a:t>"Warm-up round"</a:t>
+            </a:r>
+            <a:r>
+              <a:rPr sz="1400">
+                <a:solidFill>
+                  <a:srgbClr val="080808"/>
+                </a:solidFill>
+                <a:latin typeface="JetBrains Mono"/>
+                <a:ea typeface="JetBrains Mono"/>
+                <a:cs typeface="JetBrains Mono"/>
+              </a:rPr>
+              <a:t>, round_number)</a:t>
             </a:r>
             <a:br>
               <a:rPr sz="1400">
@@ -8001,29 +8066,7 @@
                 <a:ea typeface="JetBrains Mono"/>
                 <a:cs typeface="JetBrains Mono"/>
               </a:rPr>
-              <a:t>    </a:t>
-            </a:r>
-            <a:r>
-              <a:rPr sz="1400">
-                <a:solidFill>
-                  <a:srgbClr val="1750EB"/>
-                </a:solidFill>
-                <a:latin typeface="JetBrains Mono"/>
-                <a:ea typeface="JetBrains Mono"/>
-                <a:cs typeface="JetBrains Mono"/>
-              </a:rPr>
-              <a:t>print</a:t>
-            </a:r>
-            <a:r>
-              <a:rPr sz="1400">
-                <a:solidFill>
-                  <a:srgbClr val="080808"/>
-                </a:solidFill>
-                <a:latin typeface="JetBrains Mono"/>
-                <a:ea typeface="JetBrains Mono"/>
-                <a:cs typeface="JetBrains Mono"/>
-              </a:rPr>
-              <a:t>(</a:t>
+              <a:t>answer = </a:t>
             </a:r>
             <a:r>
               <a:rPr sz="1400">
@@ -8034,18 +8077,7 @@
                 <a:ea typeface="JetBrains Mono"/>
                 <a:cs typeface="JetBrains Mono"/>
               </a:rPr>
-              <a:t>"Warm-up round"</a:t>
-            </a:r>
-            <a:r>
-              <a:rPr sz="1400">
-                <a:solidFill>
-                  <a:srgbClr val="080808"/>
-                </a:solidFill>
-                <a:latin typeface="JetBrains Mono"/>
-                <a:ea typeface="JetBrains Mono"/>
-                <a:cs typeface="JetBrains Mono"/>
-              </a:rPr>
-              <a:t>, round_number)</a:t>
+              <a:t>""</a:t>
             </a:r>
             <a:br>
               <a:rPr sz="1400">
@@ -8060,39 +8092,7 @@
             <a:r>
               <a:rPr sz="1400">
                 <a:solidFill>
-                  <a:srgbClr val="080808"/>
-                </a:solidFill>
-                <a:latin typeface="JetBrains Mono"/>
-                <a:ea typeface="JetBrains Mono"/>
-                <a:cs typeface="JetBrains Mono"/>
-              </a:rPr>
-              <a:t>answer = </a:t>
-            </a:r>
-            <a:r>
-              <a:rPr sz="1400">
-                <a:solidFill>
-                  <a:srgbClr val="067D17"/>
-                </a:solidFill>
-                <a:latin typeface="JetBrains Mono"/>
-                <a:ea typeface="JetBrains Mono"/>
-                <a:cs typeface="JetBrains Mono"/>
-              </a:rPr>
-              <a:t>""</a:t>
-            </a:r>
-            <a:br>
-              <a:rPr sz="1400">
-                <a:solidFill>
-                  <a:srgbClr val="080808"/>
-                </a:solidFill>
-                <a:latin typeface="JetBrains Mono"/>
-                <a:ea typeface="JetBrains Mono"/>
-                <a:cs typeface="JetBrains Mono"/>
-              </a:rPr>
-            </a:br>
-            <a:r>
-              <a:rPr sz="1400">
-                <a:solidFill>
-                  <a:srgbClr val="1750EB"/>
+                  <a:srgbClr val="C45E00"/>
                 </a:solidFill>
                 <a:latin typeface="JetBrains Mono"/>
                 <a:ea typeface="JetBrains Mono"/>
@@ -8381,7 +8381,7 @@
             <a:r>
               <a:rPr sz="2050" b="0">
                 <a:solidFill>
-                  <a:srgbClr val="1750EB"/>
+                  <a:srgbClr val="C45E00"/>
                 </a:solidFill>
                 <a:latin typeface="JetBrains Mono"/>
                 <a:ea typeface="JetBrains Mono"/>
@@ -8856,24 +8856,89 @@
             <a:r>
               <a:rPr sz="1400">
                 <a:solidFill>
+                  <a:srgbClr val="C45E00"/>
+                </a:solidFill>
+                <a:latin typeface="JetBrains Mono"/>
+                <a:ea typeface="JetBrains Mono"/>
+                <a:cs typeface="JetBrains Mono"/>
+              </a:rPr>
+              <a:t>for</a:t>
+            </a:r>
+            <a:r>
+              <a:rPr sz="1400">
+                <a:solidFill>
+                  <a:srgbClr val="080808"/>
+                </a:solidFill>
+                <a:latin typeface="JetBrains Mono"/>
+                <a:ea typeface="JetBrains Mono"/>
+                <a:cs typeface="JetBrains Mono"/>
+              </a:rPr>
+              <a:t> round_number </a:t>
+            </a:r>
+            <a:r>
+              <a:rPr sz="1400">
+                <a:solidFill>
+                  <a:srgbClr val="C45E00"/>
+                </a:solidFill>
+                <a:latin typeface="JetBrains Mono"/>
+                <a:ea typeface="JetBrains Mono"/>
+                <a:cs typeface="JetBrains Mono"/>
+              </a:rPr>
+              <a:t>in</a:t>
+            </a:r>
+            <a:r>
+              <a:rPr sz="1400">
+                <a:solidFill>
+                  <a:srgbClr val="080808"/>
+                </a:solidFill>
+                <a:latin typeface="JetBrains Mono"/>
+                <a:ea typeface="JetBrains Mono"/>
+                <a:cs typeface="JetBrains Mono"/>
+              </a:rPr>
+              <a:t> </a:t>
+            </a:r>
+            <a:r>
+              <a:rPr sz="1400">
+                <a:solidFill>
                   <a:srgbClr val="1750EB"/>
                 </a:solidFill>
                 <a:latin typeface="JetBrains Mono"/>
                 <a:ea typeface="JetBrains Mono"/>
                 <a:cs typeface="JetBrains Mono"/>
               </a:rPr>
-              <a:t>for</a:t>
-            </a:r>
-            <a:r>
-              <a:rPr sz="1400">
-                <a:solidFill>
-                  <a:srgbClr val="080808"/>
-                </a:solidFill>
-                <a:latin typeface="JetBrains Mono"/>
-                <a:ea typeface="JetBrains Mono"/>
-                <a:cs typeface="JetBrains Mono"/>
-              </a:rPr>
-              <a:t> round_number </a:t>
+              <a:t>range</a:t>
+            </a:r>
+            <a:r>
+              <a:rPr sz="1400">
+                <a:solidFill>
+                  <a:srgbClr val="080808"/>
+                </a:solidFill>
+                <a:latin typeface="JetBrains Mono"/>
+                <a:ea typeface="JetBrains Mono"/>
+                <a:cs typeface="JetBrains Mono"/>
+              </a:rPr>
+              <a:t>(1, 4):</a:t>
+            </a:r>
+            <a:br>
+              <a:rPr sz="1400">
+                <a:solidFill>
+                  <a:srgbClr val="080808"/>
+                </a:solidFill>
+                <a:latin typeface="JetBrains Mono"/>
+                <a:ea typeface="JetBrains Mono"/>
+                <a:cs typeface="JetBrains Mono"/>
+              </a:rPr>
+            </a:br>
+            <a:r>
+              <a:rPr sz="1400">
+                <a:solidFill>
+                  <a:srgbClr val="080808"/>
+                </a:solidFill>
+                <a:latin typeface="JetBrains Mono"/>
+                <a:ea typeface="JetBrains Mono"/>
+                <a:cs typeface="JetBrains Mono"/>
+              </a:rPr>
+              <a:t>    </a:t>
             </a:r>
             <a:r>
               <a:rPr sz="1400">
@@ -8884,40 +8949,40 @@
                 <a:ea typeface="JetBrains Mono"/>
                 <a:cs typeface="JetBrains Mono"/>
               </a:rPr>
-              <a:t>in</a:t>
-            </a:r>
-            <a:r>
-              <a:rPr sz="1400">
-                <a:solidFill>
-                  <a:srgbClr val="080808"/>
-                </a:solidFill>
-                <a:latin typeface="JetBrains Mono"/>
-                <a:ea typeface="JetBrains Mono"/>
-                <a:cs typeface="JetBrains Mono"/>
-              </a:rPr>
-              <a:t> </a:t>
-            </a:r>
-            <a:r>
-              <a:rPr sz="1400">
-                <a:solidFill>
-                  <a:srgbClr val="1750EB"/>
-                </a:solidFill>
-                <a:latin typeface="JetBrains Mono"/>
-                <a:ea typeface="JetBrains Mono"/>
-                <a:cs typeface="JetBrains Mono"/>
-              </a:rPr>
-              <a:t>range</a:t>
-            </a:r>
-            <a:r>
-              <a:rPr sz="1400">
-                <a:solidFill>
-                  <a:srgbClr val="080808"/>
-                </a:solidFill>
-                <a:latin typeface="JetBrains Mono"/>
-                <a:ea typeface="JetBrains Mono"/>
-                <a:cs typeface="JetBrains Mono"/>
-              </a:rPr>
-              <a:t>(1, 4):</a:t>
+              <a:t>print</a:t>
+            </a:r>
+            <a:r>
+              <a:rPr sz="1400">
+                <a:solidFill>
+                  <a:srgbClr val="080808"/>
+                </a:solidFill>
+                <a:latin typeface="JetBrains Mono"/>
+                <a:ea typeface="JetBrains Mono"/>
+                <a:cs typeface="JetBrains Mono"/>
+              </a:rPr>
+              <a:t>(</a:t>
+            </a:r>
+            <a:r>
+              <a:rPr sz="1400">
+                <a:solidFill>
+                  <a:srgbClr val="067D17"/>
+                </a:solidFill>
+                <a:latin typeface="JetBrains Mono"/>
+                <a:ea typeface="JetBrains Mono"/>
+                <a:cs typeface="JetBrains Mono"/>
+              </a:rPr>
+              <a:t>"Warm-up round"</a:t>
+            </a:r>
+            <a:r>
+              <a:rPr sz="1400">
+                <a:solidFill>
+                  <a:srgbClr val="080808"/>
+                </a:solidFill>
+                <a:latin typeface="JetBrains Mono"/>
+                <a:ea typeface="JetBrains Mono"/>
+                <a:cs typeface="JetBrains Mono"/>
+              </a:rPr>
+              <a:t>, round_number)</a:t>
             </a:r>
             <a:br>
               <a:rPr sz="1400">
@@ -8938,29 +9003,7 @@
                 <a:ea typeface="JetBrains Mono"/>
                 <a:cs typeface="JetBrains Mono"/>
               </a:rPr>
-              <a:t>    </a:t>
-            </a:r>
-            <a:r>
-              <a:rPr sz="1400">
-                <a:solidFill>
-                  <a:srgbClr val="1750EB"/>
-                </a:solidFill>
-                <a:latin typeface="JetBrains Mono"/>
-                <a:ea typeface="JetBrains Mono"/>
-                <a:cs typeface="JetBrains Mono"/>
-              </a:rPr>
-              <a:t>print</a:t>
-            </a:r>
-            <a:r>
-              <a:rPr sz="1400">
-                <a:solidFill>
-                  <a:srgbClr val="080808"/>
-                </a:solidFill>
-                <a:latin typeface="JetBrains Mono"/>
-                <a:ea typeface="JetBrains Mono"/>
-                <a:cs typeface="JetBrains Mono"/>
-              </a:rPr>
-              <a:t>(</a:t>
+              <a:t>answer = </a:t>
             </a:r>
             <a:r>
               <a:rPr sz="1400">
@@ -8971,18 +9014,7 @@
                 <a:ea typeface="JetBrains Mono"/>
                 <a:cs typeface="JetBrains Mono"/>
               </a:rPr>
-              <a:t>"Warm-up round"</a:t>
-            </a:r>
-            <a:r>
-              <a:rPr sz="1400">
-                <a:solidFill>
-                  <a:srgbClr val="080808"/>
-                </a:solidFill>
-                <a:latin typeface="JetBrains Mono"/>
-                <a:ea typeface="JetBrains Mono"/>
-                <a:cs typeface="JetBrains Mono"/>
-              </a:rPr>
-              <a:t>, round_number)</a:t>
+              <a:t>""</a:t>
             </a:r>
             <a:br>
               <a:rPr sz="1400">
@@ -8997,39 +9029,7 @@
             <a:r>
               <a:rPr sz="1400">
                 <a:solidFill>
-                  <a:srgbClr val="080808"/>
-                </a:solidFill>
-                <a:latin typeface="JetBrains Mono"/>
-                <a:ea typeface="JetBrains Mono"/>
-                <a:cs typeface="JetBrains Mono"/>
-              </a:rPr>
-              <a:t>answer = </a:t>
-            </a:r>
-            <a:r>
-              <a:rPr sz="1400">
-                <a:solidFill>
-                  <a:srgbClr val="067D17"/>
-                </a:solidFill>
-                <a:latin typeface="JetBrains Mono"/>
-                <a:ea typeface="JetBrains Mono"/>
-                <a:cs typeface="JetBrains Mono"/>
-              </a:rPr>
-              <a:t>""</a:t>
-            </a:r>
-            <a:br>
-              <a:rPr sz="1400">
-                <a:solidFill>
-                  <a:srgbClr val="080808"/>
-                </a:solidFill>
-                <a:latin typeface="JetBrains Mono"/>
-                <a:ea typeface="JetBrains Mono"/>
-                <a:cs typeface="JetBrains Mono"/>
-              </a:rPr>
-            </a:br>
-            <a:r>
-              <a:rPr sz="1400">
-                <a:solidFill>
-                  <a:srgbClr val="1750EB"/>
+                  <a:srgbClr val="C45E00"/>
                 </a:solidFill>
                 <a:latin typeface="JetBrains Mono"/>
                 <a:ea typeface="JetBrains Mono"/>
@@ -9318,7 +9318,7 @@
             <a:r>
               <a:rPr sz="2050" b="0">
                 <a:solidFill>
-                  <a:srgbClr val="1750EB"/>
+                  <a:srgbClr val="C45E00"/>
                 </a:solidFill>
                 <a:latin typeface="JetBrains Mono"/>
                 <a:ea typeface="JetBrains Mono"/>
@@ -9384,7 +9384,7 @@
             <a:r>
               <a:rPr sz="2050" b="0">
                 <a:solidFill>
-                  <a:srgbClr val="1750EB"/>
+                  <a:srgbClr val="C45E00"/>
                 </a:solidFill>
                 <a:latin typeface="JetBrains Mono"/>
                 <a:ea typeface="JetBrains Mono"/>
@@ -9699,24 +9699,89 @@
             <a:r>
               <a:rPr sz="1400">
                 <a:solidFill>
+                  <a:srgbClr val="C45E00"/>
+                </a:solidFill>
+                <a:latin typeface="JetBrains Mono"/>
+                <a:ea typeface="JetBrains Mono"/>
+                <a:cs typeface="JetBrains Mono"/>
+              </a:rPr>
+              <a:t>for</a:t>
+            </a:r>
+            <a:r>
+              <a:rPr sz="1400">
+                <a:solidFill>
+                  <a:srgbClr val="080808"/>
+                </a:solidFill>
+                <a:latin typeface="JetBrains Mono"/>
+                <a:ea typeface="JetBrains Mono"/>
+                <a:cs typeface="JetBrains Mono"/>
+              </a:rPr>
+              <a:t> round_number </a:t>
+            </a:r>
+            <a:r>
+              <a:rPr sz="1400">
+                <a:solidFill>
+                  <a:srgbClr val="C45E00"/>
+                </a:solidFill>
+                <a:latin typeface="JetBrains Mono"/>
+                <a:ea typeface="JetBrains Mono"/>
+                <a:cs typeface="JetBrains Mono"/>
+              </a:rPr>
+              <a:t>in</a:t>
+            </a:r>
+            <a:r>
+              <a:rPr sz="1400">
+                <a:solidFill>
+                  <a:srgbClr val="080808"/>
+                </a:solidFill>
+                <a:latin typeface="JetBrains Mono"/>
+                <a:ea typeface="JetBrains Mono"/>
+                <a:cs typeface="JetBrains Mono"/>
+              </a:rPr>
+              <a:t> </a:t>
+            </a:r>
+            <a:r>
+              <a:rPr sz="1400">
+                <a:solidFill>
                   <a:srgbClr val="1750EB"/>
                 </a:solidFill>
                 <a:latin typeface="JetBrains Mono"/>
                 <a:ea typeface="JetBrains Mono"/>
                 <a:cs typeface="JetBrains Mono"/>
               </a:rPr>
-              <a:t>for</a:t>
-            </a:r>
-            <a:r>
-              <a:rPr sz="1400">
-                <a:solidFill>
-                  <a:srgbClr val="080808"/>
-                </a:solidFill>
-                <a:latin typeface="JetBrains Mono"/>
-                <a:ea typeface="JetBrains Mono"/>
-                <a:cs typeface="JetBrains Mono"/>
-              </a:rPr>
-              <a:t> round_number </a:t>
+              <a:t>range</a:t>
+            </a:r>
+            <a:r>
+              <a:rPr sz="1400">
+                <a:solidFill>
+                  <a:srgbClr val="080808"/>
+                </a:solidFill>
+                <a:latin typeface="JetBrains Mono"/>
+                <a:ea typeface="JetBrains Mono"/>
+                <a:cs typeface="JetBrains Mono"/>
+              </a:rPr>
+              <a:t>(1, 4):</a:t>
+            </a:r>
+            <a:br>
+              <a:rPr sz="1400">
+                <a:solidFill>
+                  <a:srgbClr val="080808"/>
+                </a:solidFill>
+                <a:latin typeface="JetBrains Mono"/>
+                <a:ea typeface="JetBrains Mono"/>
+                <a:cs typeface="JetBrains Mono"/>
+              </a:rPr>
+            </a:br>
+            <a:r>
+              <a:rPr sz="1400">
+                <a:solidFill>
+                  <a:srgbClr val="080808"/>
+                </a:solidFill>
+                <a:latin typeface="JetBrains Mono"/>
+                <a:ea typeface="JetBrains Mono"/>
+                <a:cs typeface="JetBrains Mono"/>
+              </a:rPr>
+              <a:t>    </a:t>
             </a:r>
             <a:r>
               <a:rPr sz="1400">
@@ -9727,40 +9792,40 @@
                 <a:ea typeface="JetBrains Mono"/>
                 <a:cs typeface="JetBrains Mono"/>
               </a:rPr>
-              <a:t>in</a:t>
-            </a:r>
-            <a:r>
-              <a:rPr sz="1400">
-                <a:solidFill>
-                  <a:srgbClr val="080808"/>
-                </a:solidFill>
-                <a:latin typeface="JetBrains Mono"/>
-                <a:ea typeface="JetBrains Mono"/>
-                <a:cs typeface="JetBrains Mono"/>
-              </a:rPr>
-              <a:t> </a:t>
-            </a:r>
-            <a:r>
-              <a:rPr sz="1400">
-                <a:solidFill>
-                  <a:srgbClr val="1750EB"/>
-                </a:solidFill>
-                <a:latin typeface="JetBrains Mono"/>
-                <a:ea typeface="JetBrains Mono"/>
-                <a:cs typeface="JetBrains Mono"/>
-              </a:rPr>
-              <a:t>range</a:t>
-            </a:r>
-            <a:r>
-              <a:rPr sz="1400">
-                <a:solidFill>
-                  <a:srgbClr val="080808"/>
-                </a:solidFill>
-                <a:latin typeface="JetBrains Mono"/>
-                <a:ea typeface="JetBrains Mono"/>
-                <a:cs typeface="JetBrains Mono"/>
-              </a:rPr>
-              <a:t>(1, 4):</a:t>
+              <a:t>print</a:t>
+            </a:r>
+            <a:r>
+              <a:rPr sz="1400">
+                <a:solidFill>
+                  <a:srgbClr val="080808"/>
+                </a:solidFill>
+                <a:latin typeface="JetBrains Mono"/>
+                <a:ea typeface="JetBrains Mono"/>
+                <a:cs typeface="JetBrains Mono"/>
+              </a:rPr>
+              <a:t>(</a:t>
+            </a:r>
+            <a:r>
+              <a:rPr sz="1400">
+                <a:solidFill>
+                  <a:srgbClr val="067D17"/>
+                </a:solidFill>
+                <a:latin typeface="JetBrains Mono"/>
+                <a:ea typeface="JetBrains Mono"/>
+                <a:cs typeface="JetBrains Mono"/>
+              </a:rPr>
+              <a:t>"Warm-up round"</a:t>
+            </a:r>
+            <a:r>
+              <a:rPr sz="1400">
+                <a:solidFill>
+                  <a:srgbClr val="080808"/>
+                </a:solidFill>
+                <a:latin typeface="JetBrains Mono"/>
+                <a:ea typeface="JetBrains Mono"/>
+                <a:cs typeface="JetBrains Mono"/>
+              </a:rPr>
+              <a:t>, round_number)</a:t>
             </a:r>
             <a:br>
               <a:rPr sz="1400">
@@ -9781,29 +9846,7 @@
                 <a:ea typeface="JetBrains Mono"/>
                 <a:cs typeface="JetBrains Mono"/>
               </a:rPr>
-              <a:t>    </a:t>
-            </a:r>
-            <a:r>
-              <a:rPr sz="1400">
-                <a:solidFill>
-                  <a:srgbClr val="1750EB"/>
-                </a:solidFill>
-                <a:latin typeface="JetBrains Mono"/>
-                <a:ea typeface="JetBrains Mono"/>
-                <a:cs typeface="JetBrains Mono"/>
-              </a:rPr>
-              <a:t>print</a:t>
-            </a:r>
-            <a:r>
-              <a:rPr sz="1400">
-                <a:solidFill>
-                  <a:srgbClr val="080808"/>
-                </a:solidFill>
-                <a:latin typeface="JetBrains Mono"/>
-                <a:ea typeface="JetBrains Mono"/>
-                <a:cs typeface="JetBrains Mono"/>
-              </a:rPr>
-              <a:t>(</a:t>
+              <a:t>answer = </a:t>
             </a:r>
             <a:r>
               <a:rPr sz="1400">
@@ -9814,18 +9857,7 @@
                 <a:ea typeface="JetBrains Mono"/>
                 <a:cs typeface="JetBrains Mono"/>
               </a:rPr>
-              <a:t>"Warm-up round"</a:t>
-            </a:r>
-            <a:r>
-              <a:rPr sz="1400">
-                <a:solidFill>
-                  <a:srgbClr val="080808"/>
-                </a:solidFill>
-                <a:latin typeface="JetBrains Mono"/>
-                <a:ea typeface="JetBrains Mono"/>
-                <a:cs typeface="JetBrains Mono"/>
-              </a:rPr>
-              <a:t>, round_number)</a:t>
+              <a:t>""</a:t>
             </a:r>
             <a:br>
               <a:rPr sz="1400">
@@ -9840,39 +9872,7 @@
             <a:r>
               <a:rPr sz="1400">
                 <a:solidFill>
-                  <a:srgbClr val="080808"/>
-                </a:solidFill>
-                <a:latin typeface="JetBrains Mono"/>
-                <a:ea typeface="JetBrains Mono"/>
-                <a:cs typeface="JetBrains Mono"/>
-              </a:rPr>
-              <a:t>answer = </a:t>
-            </a:r>
-            <a:r>
-              <a:rPr sz="1400">
-                <a:solidFill>
-                  <a:srgbClr val="067D17"/>
-                </a:solidFill>
-                <a:latin typeface="JetBrains Mono"/>
-                <a:ea typeface="JetBrains Mono"/>
-                <a:cs typeface="JetBrains Mono"/>
-              </a:rPr>
-              <a:t>""</a:t>
-            </a:r>
-            <a:br>
-              <a:rPr sz="1400">
-                <a:solidFill>
-                  <a:srgbClr val="080808"/>
-                </a:solidFill>
-                <a:latin typeface="JetBrains Mono"/>
-                <a:ea typeface="JetBrains Mono"/>
-                <a:cs typeface="JetBrains Mono"/>
-              </a:rPr>
-            </a:br>
-            <a:r>
-              <a:rPr sz="1400">
-                <a:solidFill>
-                  <a:srgbClr val="1750EB"/>
+                  <a:srgbClr val="C45E00"/>
                 </a:solidFill>
                 <a:latin typeface="JetBrains Mono"/>
                 <a:ea typeface="JetBrains Mono"/>
@@ -10190,7 +10190,7 @@
             <a:r>
               <a:rPr sz="1800">
                 <a:solidFill>
-                  <a:srgbClr val="1750EB"/>
+                  <a:srgbClr val="C45E00"/>
                 </a:solidFill>
                 <a:latin typeface="JetBrains Mono"/>
                 <a:ea typeface="JetBrains Mono"/>
@@ -10212,7 +10212,7 @@
             <a:r>
               <a:rPr sz="1800">
                 <a:solidFill>
-                  <a:srgbClr val="1750EB"/>
+                  <a:srgbClr val="C45E00"/>
                 </a:solidFill>
                 <a:latin typeface="JetBrains Mono"/>
                 <a:ea typeface="JetBrains Mono"/>
@@ -10357,7 +10357,7 @@
             <a:r>
               <a:rPr sz="1800">
                 <a:solidFill>
-                  <a:srgbClr val="1750EB"/>
+                  <a:srgbClr val="C45E00"/>
                 </a:solidFill>
                 <a:latin typeface="JetBrains Mono"/>
                 <a:ea typeface="JetBrains Mono"/>

--- a/Mapped Curriculum Lessons/Grade 6/Lesson 10 - Choosing Loop Structures/Choosing Loop Structures - Slides.pptx
+++ b/Mapped Curriculum Lessons/Grade 6/Lesson 10 - Choosing Loop Structures/Choosing Loop Structures - Slides.pptx
@@ -2,28 +2,28 @@
 <file path=ppt/presentation.xml><?xml version="1.0" encoding="utf-8"?>
 <p:presentation xmlns:p="http://schemas.openxmlformats.org/presentationml/2006/main" embedTrueTypeFonts="1" saveSubsetFonts="0">
   <p:sldMasterIdLst>
-    <p:sldMasterId xmlns:r="http://schemas.openxmlformats.org/officeDocument/2006/relationships" id="2147483648" r:id="Rc952ef9ca3fb4b81"/>
+    <p:sldMasterId xmlns:r="http://schemas.openxmlformats.org/officeDocument/2006/relationships" id="2147483648" r:id="R8ec1f8a78b6f4e0b"/>
   </p:sldMasterIdLst>
   <p:notesMasterIdLst>
-    <p:notesMasterId xmlns:r="http://schemas.openxmlformats.org/officeDocument/2006/relationships" r:id="Rb4f4749652f6448a"/>
+    <p:notesMasterId xmlns:r="http://schemas.openxmlformats.org/officeDocument/2006/relationships" r:id="R337d80791cda41ab"/>
   </p:notesMasterIdLst>
   <p:sldIdLst>
-    <p:sldId xmlns:r="http://schemas.openxmlformats.org/officeDocument/2006/relationships" id="256" r:id="R8eaaaad47fc94d16"/>
-    <p:sldId xmlns:r="http://schemas.openxmlformats.org/officeDocument/2006/relationships" id="257" r:id="R42bee28c6a834eff"/>
-    <p:sldId xmlns:r="http://schemas.openxmlformats.org/officeDocument/2006/relationships" id="258" r:id="R3dd85e758d334277"/>
-    <p:sldId xmlns:r="http://schemas.openxmlformats.org/officeDocument/2006/relationships" id="259" r:id="Rbecee20862ff42be"/>
-    <p:sldId xmlns:r="http://schemas.openxmlformats.org/officeDocument/2006/relationships" id="260" r:id="Rfefb7a8288de4f1b"/>
-    <p:sldId xmlns:r="http://schemas.openxmlformats.org/officeDocument/2006/relationships" id="261" r:id="Ra32e03e4c62547c8"/>
-    <p:sldId xmlns:r="http://schemas.openxmlformats.org/officeDocument/2006/relationships" id="262" r:id="Rec74457eaa9647fe"/>
-    <p:sldId xmlns:r="http://schemas.openxmlformats.org/officeDocument/2006/relationships" id="263" r:id="R76e3be5242474097"/>
-    <p:sldId xmlns:r="http://schemas.openxmlformats.org/officeDocument/2006/relationships" id="264" r:id="R05b7febd86dc4b2d"/>
+    <p:sldId xmlns:r="http://schemas.openxmlformats.org/officeDocument/2006/relationships" id="256" r:id="Re6a5e7018c6e4c38"/>
+    <p:sldId xmlns:r="http://schemas.openxmlformats.org/officeDocument/2006/relationships" id="257" r:id="R8f3e67a4dcc24b8a"/>
+    <p:sldId xmlns:r="http://schemas.openxmlformats.org/officeDocument/2006/relationships" id="258" r:id="R5a62d1ddcccc442c"/>
+    <p:sldId xmlns:r="http://schemas.openxmlformats.org/officeDocument/2006/relationships" id="259" r:id="R9784b420edc743df"/>
+    <p:sldId xmlns:r="http://schemas.openxmlformats.org/officeDocument/2006/relationships" id="260" r:id="R6102a440ecbd4005"/>
+    <p:sldId xmlns:r="http://schemas.openxmlformats.org/officeDocument/2006/relationships" id="261" r:id="Ra85eb4cbedc541b9"/>
+    <p:sldId xmlns:r="http://schemas.openxmlformats.org/officeDocument/2006/relationships" id="262" r:id="Rbd13a38e35a84d7f"/>
+    <p:sldId xmlns:r="http://schemas.openxmlformats.org/officeDocument/2006/relationships" id="263" r:id="R80e439313ac24efc"/>
+    <p:sldId xmlns:r="http://schemas.openxmlformats.org/officeDocument/2006/relationships" id="264" r:id="Rbddfe8ad9ae14083"/>
   </p:sldIdLst>
   <p:sldSz cx="12192000" cy="6858000"/>
   <p:notesSz cx="6858000" cy="9144000"/>
   <p:embeddedFontLst>
     <p:embeddedFont>
       <p:font typeface="JetBrains Mono"/>
-      <p:regular xmlns:r="http://schemas.openxmlformats.org/officeDocument/2006/relationships" r:id="R74a159c583704016"/>
+      <p:regular xmlns:r="http://schemas.openxmlformats.org/officeDocument/2006/relationships" r:id="R1f2db2129d434484"/>
     </p:embeddedFont>
   </p:embeddedFontLst>
 </p:presentation>
@@ -1071,7 +1071,7 @@
           <p:nvPr/>
         </p:nvPicPr>
         <p:blipFill rotWithShape="1">
-          <a:blip xmlns:r="http://schemas.openxmlformats.org/officeDocument/2006/relationships" xmlns:a="http://schemas.openxmlformats.org/drawingml/2006/main" r:embed="R824034d385fc45e2"/>
+          <a:blip xmlns:r="http://schemas.openxmlformats.org/officeDocument/2006/relationships" xmlns:a="http://schemas.openxmlformats.org/drawingml/2006/main" r:embed="R4badccce3ac04009"/>
           <a:stretch xmlns:a="http://schemas.openxmlformats.org/drawingml/2006/main"/>
         </p:blipFill>
         <p:spPr>
@@ -1451,7 +1451,7 @@
           <p:nvPr/>
         </p:nvPicPr>
         <p:blipFill rotWithShape="1">
-          <a:blip xmlns:r="http://schemas.openxmlformats.org/officeDocument/2006/relationships" xmlns:a="http://schemas.openxmlformats.org/drawingml/2006/main" r:embed="R9458abae58d14e2b">
+          <a:blip xmlns:r="http://schemas.openxmlformats.org/officeDocument/2006/relationships" xmlns:a="http://schemas.openxmlformats.org/drawingml/2006/main" r:embed="Rda9bb13161e84f43">
             <a:alphaModFix amt="28000"/>
           </a:blip>
           <a:stretch xmlns:a="http://schemas.openxmlformats.org/drawingml/2006/main"/>
@@ -1664,7 +1664,7 @@
           <p:nvPr/>
         </p:nvPicPr>
         <p:blipFill rotWithShape="1">
-          <a:blip xmlns:r="http://schemas.openxmlformats.org/officeDocument/2006/relationships" xmlns:a="http://schemas.openxmlformats.org/drawingml/2006/main" r:embed="Ra8ab8760364f41fc">
+          <a:blip xmlns:r="http://schemas.openxmlformats.org/officeDocument/2006/relationships" xmlns:a="http://schemas.openxmlformats.org/drawingml/2006/main" r:embed="Redf2e741528d4462">
             <a:alphaModFix amt="28000"/>
           </a:blip>
           <a:stretch xmlns:a="http://schemas.openxmlformats.org/drawingml/2006/main"/>
@@ -1899,7 +1899,7 @@
           <p:nvPr/>
         </p:nvPicPr>
         <p:blipFill rotWithShape="1">
-          <a:blip xmlns:r="http://schemas.openxmlformats.org/officeDocument/2006/relationships" xmlns:a="http://schemas.openxmlformats.org/drawingml/2006/main" r:embed="Rd06c09cd22b1434a">
+          <a:blip xmlns:r="http://schemas.openxmlformats.org/officeDocument/2006/relationships" xmlns:a="http://schemas.openxmlformats.org/drawingml/2006/main" r:embed="R7736c925bd1b447d">
             <a:alphaModFix amt="28000"/>
           </a:blip>
           <a:stretch xmlns:a="http://schemas.openxmlformats.org/drawingml/2006/main"/>
@@ -2176,7 +2176,7 @@
           <p:nvPr/>
         </p:nvPicPr>
         <p:blipFill rotWithShape="1">
-          <a:blip xmlns:r="http://schemas.openxmlformats.org/officeDocument/2006/relationships" xmlns:a="http://schemas.openxmlformats.org/drawingml/2006/main" r:embed="R53e5235e169d47b6">
+          <a:blip xmlns:r="http://schemas.openxmlformats.org/officeDocument/2006/relationships" xmlns:a="http://schemas.openxmlformats.org/drawingml/2006/main" r:embed="R1885a45f67b74396">
             <a:alphaModFix amt="28000"/>
           </a:blip>
           <a:stretch xmlns:a="http://schemas.openxmlformats.org/drawingml/2006/main"/>
@@ -2451,7 +2451,7 @@
           <p:nvPr/>
         </p:nvPicPr>
         <p:blipFill rotWithShape="1">
-          <a:blip xmlns:r="http://schemas.openxmlformats.org/officeDocument/2006/relationships" xmlns:a="http://schemas.openxmlformats.org/drawingml/2006/main" r:embed="Rb4382b0184194efd">
+          <a:blip xmlns:r="http://schemas.openxmlformats.org/officeDocument/2006/relationships" xmlns:a="http://schemas.openxmlformats.org/drawingml/2006/main" r:embed="R5b5d4c13d9cf489e">
             <a:alphaModFix amt="28000"/>
           </a:blip>
           <a:stretch xmlns:a="http://schemas.openxmlformats.org/drawingml/2006/main"/>
@@ -2875,7 +2875,7 @@
           <p:nvPr/>
         </p:nvPicPr>
         <p:blipFill rotWithShape="1">
-          <a:blip xmlns:r="http://schemas.openxmlformats.org/officeDocument/2006/relationships" xmlns:a="http://schemas.openxmlformats.org/drawingml/2006/main" r:embed="R0ccd1121ea0d4c64">
+          <a:blip xmlns:r="http://schemas.openxmlformats.org/officeDocument/2006/relationships" xmlns:a="http://schemas.openxmlformats.org/drawingml/2006/main" r:embed="Rcdb27dbf06324925">
             <a:alphaModFix amt="28000"/>
           </a:blip>
           <a:stretch xmlns:a="http://schemas.openxmlformats.org/drawingml/2006/main"/>
@@ -3016,7 +3016,7 @@
           <p:nvPr/>
         </p:nvPicPr>
         <p:blipFill rotWithShape="1">
-          <a:blip xmlns:r="http://schemas.openxmlformats.org/officeDocument/2006/relationships" xmlns:a="http://schemas.openxmlformats.org/drawingml/2006/main" r:embed="Rbb608547bdd7401e">
+          <a:blip xmlns:r="http://schemas.openxmlformats.org/officeDocument/2006/relationships" xmlns:a="http://schemas.openxmlformats.org/drawingml/2006/main" r:embed="Rd5e838c3a3c847b9">
             <a:alphaModFix amt="28000"/>
           </a:blip>
           <a:stretch xmlns:a="http://schemas.openxmlformats.org/drawingml/2006/main"/>
@@ -3130,7 +3130,7 @@
           <p:nvPr/>
         </p:nvPicPr>
         <p:blipFill rotWithShape="1">
-          <a:blip xmlns:r="http://schemas.openxmlformats.org/officeDocument/2006/relationships" xmlns:a="http://schemas.openxmlformats.org/drawingml/2006/main" r:embed="R6531fd554ed54c2c">
+          <a:blip xmlns:r="http://schemas.openxmlformats.org/officeDocument/2006/relationships" xmlns:a="http://schemas.openxmlformats.org/drawingml/2006/main" r:embed="Re5092727691745e8">
             <a:alphaModFix amt="28000"/>
           </a:blip>
           <a:stretch xmlns:a="http://schemas.openxmlformats.org/drawingml/2006/main"/>
@@ -3457,7 +3457,7 @@
           <p:nvPr/>
         </p:nvPicPr>
         <p:blipFill rotWithShape="1">
-          <a:blip xmlns:r="http://schemas.openxmlformats.org/officeDocument/2006/relationships" xmlns:a="http://schemas.openxmlformats.org/drawingml/2006/main" r:embed="Rb28e246e3ce04faa">
+          <a:blip xmlns:r="http://schemas.openxmlformats.org/officeDocument/2006/relationships" xmlns:a="http://schemas.openxmlformats.org/drawingml/2006/main" r:embed="R89a1a610ed3f4886">
             <a:alphaModFix amt="28000"/>
           </a:blip>
           <a:stretch xmlns:a="http://schemas.openxmlformats.org/drawingml/2006/main"/>
@@ -3745,7 +3745,7 @@
           <p:nvPr/>
         </p:nvPicPr>
         <p:blipFill rotWithShape="1">
-          <a:blip xmlns:r="http://schemas.openxmlformats.org/officeDocument/2006/relationships" xmlns:a="http://schemas.openxmlformats.org/drawingml/2006/main" r:embed="R6ac421c4d304476f">
+          <a:blip xmlns:r="http://schemas.openxmlformats.org/officeDocument/2006/relationships" xmlns:a="http://schemas.openxmlformats.org/drawingml/2006/main" r:embed="R7dfbb6557cb2491b">
             <a:alphaModFix amt="28000"/>
           </a:blip>
           <a:stretch xmlns:a="http://schemas.openxmlformats.org/drawingml/2006/main"/>
@@ -3982,17 +3982,17 @@
   </p:cSld>
   <p:clrMap bg1="lt1" tx1="dk1" bg2="lt2" tx2="dk2" accent1="accent1" accent2="accent2" accent3="accent3" accent4="accent4" accent5="accent5" accent6="accent6" hlink="hlink" folHlink="folHlink"/>
   <p:sldLayoutIdLst>
-    <p:sldLayoutId xmlns:r="http://schemas.openxmlformats.org/officeDocument/2006/relationships" id="2147483649" r:id="Rbb170f70adc74591"/>
-    <p:sldLayoutId xmlns:r="http://schemas.openxmlformats.org/officeDocument/2006/relationships" id="2147483650" r:id="R22615e5f86434224"/>
-    <p:sldLayoutId xmlns:r="http://schemas.openxmlformats.org/officeDocument/2006/relationships" id="2147483651" r:id="R160824cbbcc64608"/>
-    <p:sldLayoutId xmlns:r="http://schemas.openxmlformats.org/officeDocument/2006/relationships" id="2147483652" r:id="R45e3a19a5ce7474b"/>
-    <p:sldLayoutId xmlns:r="http://schemas.openxmlformats.org/officeDocument/2006/relationships" id="2147483653" r:id="Rb8eede6114c04df0"/>
-    <p:sldLayoutId xmlns:r="http://schemas.openxmlformats.org/officeDocument/2006/relationships" id="2147483654" r:id="Rb62bdac3d4f04527"/>
-    <p:sldLayoutId xmlns:r="http://schemas.openxmlformats.org/officeDocument/2006/relationships" id="2147483655" r:id="R1b9c6ff2d6e54ba3"/>
-    <p:sldLayoutId xmlns:r="http://schemas.openxmlformats.org/officeDocument/2006/relationships" id="2147483656" r:id="R74c1973a93144844"/>
-    <p:sldLayoutId xmlns:r="http://schemas.openxmlformats.org/officeDocument/2006/relationships" id="2147483657" r:id="Rb91d41a5994d4eea"/>
-    <p:sldLayoutId xmlns:r="http://schemas.openxmlformats.org/officeDocument/2006/relationships" id="2147483658" r:id="R20789913d24c471f"/>
-    <p:sldLayoutId xmlns:r="http://schemas.openxmlformats.org/officeDocument/2006/relationships" id="2147483659" r:id="Rf8c3bc0937fc4faa"/>
+    <p:sldLayoutId xmlns:r="http://schemas.openxmlformats.org/officeDocument/2006/relationships" id="2147483649" r:id="R8bed8cbac5e94965"/>
+    <p:sldLayoutId xmlns:r="http://schemas.openxmlformats.org/officeDocument/2006/relationships" id="2147483650" r:id="R2bfc873e48ae4e8b"/>
+    <p:sldLayoutId xmlns:r="http://schemas.openxmlformats.org/officeDocument/2006/relationships" id="2147483651" r:id="Rb8a4201ed9d14099"/>
+    <p:sldLayoutId xmlns:r="http://schemas.openxmlformats.org/officeDocument/2006/relationships" id="2147483652" r:id="R07e5f5a999664c30"/>
+    <p:sldLayoutId xmlns:r="http://schemas.openxmlformats.org/officeDocument/2006/relationships" id="2147483653" r:id="R4ae374b93d4a4d7b"/>
+    <p:sldLayoutId xmlns:r="http://schemas.openxmlformats.org/officeDocument/2006/relationships" id="2147483654" r:id="Rfab12ee41fee4f8c"/>
+    <p:sldLayoutId xmlns:r="http://schemas.openxmlformats.org/officeDocument/2006/relationships" id="2147483655" r:id="Rf0630cb4a21c4064"/>
+    <p:sldLayoutId xmlns:r="http://schemas.openxmlformats.org/officeDocument/2006/relationships" id="2147483656" r:id="R009d83009ae24103"/>
+    <p:sldLayoutId xmlns:r="http://schemas.openxmlformats.org/officeDocument/2006/relationships" id="2147483657" r:id="R5cdf5cee283f42cf"/>
+    <p:sldLayoutId xmlns:r="http://schemas.openxmlformats.org/officeDocument/2006/relationships" id="2147483658" r:id="R55ce979bd60a4d02"/>
+    <p:sldLayoutId xmlns:r="http://schemas.openxmlformats.org/officeDocument/2006/relationships" id="2147483659" r:id="Rffce237f647040fc"/>
   </p:sldLayoutIdLst>
   <p:hf hdr="0" ftr="0" dt="0"/>
   <p:txStyles>

--- a/Mapped Curriculum Lessons/Grade 6/Lesson 10 - Choosing Loop Structures/Choosing Loop Structures - Slides.pptx
+++ b/Mapped Curriculum Lessons/Grade 6/Lesson 10 - Choosing Loop Structures/Choosing Loop Structures - Slides.pptx
@@ -2,28 +2,28 @@
 <file path=ppt/presentation.xml><?xml version="1.0" encoding="utf-8"?>
 <p:presentation xmlns:p="http://schemas.openxmlformats.org/presentationml/2006/main" embedTrueTypeFonts="1" saveSubsetFonts="0">
   <p:sldMasterIdLst>
-    <p:sldMasterId xmlns:r="http://schemas.openxmlformats.org/officeDocument/2006/relationships" id="2147483648" r:id="R8ec1f8a78b6f4e0b"/>
+    <p:sldMasterId xmlns:r="http://schemas.openxmlformats.org/officeDocument/2006/relationships" id="2147483648" r:id="R014c4481c357490d"/>
   </p:sldMasterIdLst>
   <p:notesMasterIdLst>
-    <p:notesMasterId xmlns:r="http://schemas.openxmlformats.org/officeDocument/2006/relationships" r:id="R337d80791cda41ab"/>
+    <p:notesMasterId xmlns:r="http://schemas.openxmlformats.org/officeDocument/2006/relationships" r:id="R4bc4d1cba27e4fb8"/>
   </p:notesMasterIdLst>
   <p:sldIdLst>
-    <p:sldId xmlns:r="http://schemas.openxmlformats.org/officeDocument/2006/relationships" id="256" r:id="Re6a5e7018c6e4c38"/>
-    <p:sldId xmlns:r="http://schemas.openxmlformats.org/officeDocument/2006/relationships" id="257" r:id="R8f3e67a4dcc24b8a"/>
-    <p:sldId xmlns:r="http://schemas.openxmlformats.org/officeDocument/2006/relationships" id="258" r:id="R5a62d1ddcccc442c"/>
-    <p:sldId xmlns:r="http://schemas.openxmlformats.org/officeDocument/2006/relationships" id="259" r:id="R9784b420edc743df"/>
-    <p:sldId xmlns:r="http://schemas.openxmlformats.org/officeDocument/2006/relationships" id="260" r:id="R6102a440ecbd4005"/>
-    <p:sldId xmlns:r="http://schemas.openxmlformats.org/officeDocument/2006/relationships" id="261" r:id="Ra85eb4cbedc541b9"/>
-    <p:sldId xmlns:r="http://schemas.openxmlformats.org/officeDocument/2006/relationships" id="262" r:id="Rbd13a38e35a84d7f"/>
-    <p:sldId xmlns:r="http://schemas.openxmlformats.org/officeDocument/2006/relationships" id="263" r:id="R80e439313ac24efc"/>
-    <p:sldId xmlns:r="http://schemas.openxmlformats.org/officeDocument/2006/relationships" id="264" r:id="Rbddfe8ad9ae14083"/>
+    <p:sldId xmlns:r="http://schemas.openxmlformats.org/officeDocument/2006/relationships" id="256" r:id="R6f868e30148348ca"/>
+    <p:sldId xmlns:r="http://schemas.openxmlformats.org/officeDocument/2006/relationships" id="257" r:id="Rcb092214ef094aac"/>
+    <p:sldId xmlns:r="http://schemas.openxmlformats.org/officeDocument/2006/relationships" id="258" r:id="R0f69cc661fa24111"/>
+    <p:sldId xmlns:r="http://schemas.openxmlformats.org/officeDocument/2006/relationships" id="259" r:id="R83d7651c86dd4717"/>
+    <p:sldId xmlns:r="http://schemas.openxmlformats.org/officeDocument/2006/relationships" id="260" r:id="R73f017c5bded4fd3"/>
+    <p:sldId xmlns:r="http://schemas.openxmlformats.org/officeDocument/2006/relationships" id="261" r:id="R51c22c960fff49be"/>
+    <p:sldId xmlns:r="http://schemas.openxmlformats.org/officeDocument/2006/relationships" id="262" r:id="R7dd6dd13a90a4cbd"/>
+    <p:sldId xmlns:r="http://schemas.openxmlformats.org/officeDocument/2006/relationships" id="263" r:id="R7643c92988e84eb3"/>
+    <p:sldId xmlns:r="http://schemas.openxmlformats.org/officeDocument/2006/relationships" id="264" r:id="R85b1c77395534569"/>
   </p:sldIdLst>
   <p:sldSz cx="12192000" cy="6858000"/>
   <p:notesSz cx="6858000" cy="9144000"/>
   <p:embeddedFontLst>
     <p:embeddedFont>
       <p:font typeface="JetBrains Mono"/>
-      <p:regular xmlns:r="http://schemas.openxmlformats.org/officeDocument/2006/relationships" r:id="R1f2db2129d434484"/>
+      <p:regular xmlns:r="http://schemas.openxmlformats.org/officeDocument/2006/relationships" r:id="R1f3e97f4e0264ade"/>
     </p:embeddedFont>
   </p:embeddedFontLst>
 </p:presentation>
@@ -1071,7 +1071,7 @@
           <p:nvPr/>
         </p:nvPicPr>
         <p:blipFill rotWithShape="1">
-          <a:blip xmlns:r="http://schemas.openxmlformats.org/officeDocument/2006/relationships" xmlns:a="http://schemas.openxmlformats.org/drawingml/2006/main" r:embed="R4badccce3ac04009"/>
+          <a:blip xmlns:r="http://schemas.openxmlformats.org/officeDocument/2006/relationships" xmlns:a="http://schemas.openxmlformats.org/drawingml/2006/main" r:embed="R7c637a3f3c954be5"/>
           <a:stretch xmlns:a="http://schemas.openxmlformats.org/drawingml/2006/main"/>
         </p:blipFill>
         <p:spPr>
@@ -1451,7 +1451,7 @@
           <p:nvPr/>
         </p:nvPicPr>
         <p:blipFill rotWithShape="1">
-          <a:blip xmlns:r="http://schemas.openxmlformats.org/officeDocument/2006/relationships" xmlns:a="http://schemas.openxmlformats.org/drawingml/2006/main" r:embed="Rda9bb13161e84f43">
+          <a:blip xmlns:r="http://schemas.openxmlformats.org/officeDocument/2006/relationships" xmlns:a="http://schemas.openxmlformats.org/drawingml/2006/main" r:embed="R4c2c1b496f8f4bca">
             <a:alphaModFix amt="28000"/>
           </a:blip>
           <a:stretch xmlns:a="http://schemas.openxmlformats.org/drawingml/2006/main"/>
@@ -1664,7 +1664,7 @@
           <p:nvPr/>
         </p:nvPicPr>
         <p:blipFill rotWithShape="1">
-          <a:blip xmlns:r="http://schemas.openxmlformats.org/officeDocument/2006/relationships" xmlns:a="http://schemas.openxmlformats.org/drawingml/2006/main" r:embed="Redf2e741528d4462">
+          <a:blip xmlns:r="http://schemas.openxmlformats.org/officeDocument/2006/relationships" xmlns:a="http://schemas.openxmlformats.org/drawingml/2006/main" r:embed="R696a0c6c643d496c">
             <a:alphaModFix amt="28000"/>
           </a:blip>
           <a:stretch xmlns:a="http://schemas.openxmlformats.org/drawingml/2006/main"/>
@@ -1899,7 +1899,7 @@
           <p:nvPr/>
         </p:nvPicPr>
         <p:blipFill rotWithShape="1">
-          <a:blip xmlns:r="http://schemas.openxmlformats.org/officeDocument/2006/relationships" xmlns:a="http://schemas.openxmlformats.org/drawingml/2006/main" r:embed="R7736c925bd1b447d">
+          <a:blip xmlns:r="http://schemas.openxmlformats.org/officeDocument/2006/relationships" xmlns:a="http://schemas.openxmlformats.org/drawingml/2006/main" r:embed="R0f589f39736b4924">
             <a:alphaModFix amt="28000"/>
           </a:blip>
           <a:stretch xmlns:a="http://schemas.openxmlformats.org/drawingml/2006/main"/>
@@ -2176,7 +2176,7 @@
           <p:nvPr/>
         </p:nvPicPr>
         <p:blipFill rotWithShape="1">
-          <a:blip xmlns:r="http://schemas.openxmlformats.org/officeDocument/2006/relationships" xmlns:a="http://schemas.openxmlformats.org/drawingml/2006/main" r:embed="R1885a45f67b74396">
+          <a:blip xmlns:r="http://schemas.openxmlformats.org/officeDocument/2006/relationships" xmlns:a="http://schemas.openxmlformats.org/drawingml/2006/main" r:embed="Rcde4bff1a19a41f0">
             <a:alphaModFix amt="28000"/>
           </a:blip>
           <a:stretch xmlns:a="http://schemas.openxmlformats.org/drawingml/2006/main"/>
@@ -2451,7 +2451,7 @@
           <p:nvPr/>
         </p:nvPicPr>
         <p:blipFill rotWithShape="1">
-          <a:blip xmlns:r="http://schemas.openxmlformats.org/officeDocument/2006/relationships" xmlns:a="http://schemas.openxmlformats.org/drawingml/2006/main" r:embed="R5b5d4c13d9cf489e">
+          <a:blip xmlns:r="http://schemas.openxmlformats.org/officeDocument/2006/relationships" xmlns:a="http://schemas.openxmlformats.org/drawingml/2006/main" r:embed="Rc8f7f7c8183d414b">
             <a:alphaModFix amt="28000"/>
           </a:blip>
           <a:stretch xmlns:a="http://schemas.openxmlformats.org/drawingml/2006/main"/>
@@ -2875,7 +2875,7 @@
           <p:nvPr/>
         </p:nvPicPr>
         <p:blipFill rotWithShape="1">
-          <a:blip xmlns:r="http://schemas.openxmlformats.org/officeDocument/2006/relationships" xmlns:a="http://schemas.openxmlformats.org/drawingml/2006/main" r:embed="Rcdb27dbf06324925">
+          <a:blip xmlns:r="http://schemas.openxmlformats.org/officeDocument/2006/relationships" xmlns:a="http://schemas.openxmlformats.org/drawingml/2006/main" r:embed="Rffbf6e683e664f83">
             <a:alphaModFix amt="28000"/>
           </a:blip>
           <a:stretch xmlns:a="http://schemas.openxmlformats.org/drawingml/2006/main"/>
@@ -3016,7 +3016,7 @@
           <p:nvPr/>
         </p:nvPicPr>
         <p:blipFill rotWithShape="1">
-          <a:blip xmlns:r="http://schemas.openxmlformats.org/officeDocument/2006/relationships" xmlns:a="http://schemas.openxmlformats.org/drawingml/2006/main" r:embed="Rd5e838c3a3c847b9">
+          <a:blip xmlns:r="http://schemas.openxmlformats.org/officeDocument/2006/relationships" xmlns:a="http://schemas.openxmlformats.org/drawingml/2006/main" r:embed="R6859bf7c8d554e6d">
             <a:alphaModFix amt="28000"/>
           </a:blip>
           <a:stretch xmlns:a="http://schemas.openxmlformats.org/drawingml/2006/main"/>
@@ -3130,7 +3130,7 @@
           <p:nvPr/>
         </p:nvPicPr>
         <p:blipFill rotWithShape="1">
-          <a:blip xmlns:r="http://schemas.openxmlformats.org/officeDocument/2006/relationships" xmlns:a="http://schemas.openxmlformats.org/drawingml/2006/main" r:embed="Re5092727691745e8">
+          <a:blip xmlns:r="http://schemas.openxmlformats.org/officeDocument/2006/relationships" xmlns:a="http://schemas.openxmlformats.org/drawingml/2006/main" r:embed="R7aad1aa2da8f4cea">
             <a:alphaModFix amt="28000"/>
           </a:blip>
           <a:stretch xmlns:a="http://schemas.openxmlformats.org/drawingml/2006/main"/>
@@ -3457,7 +3457,7 @@
           <p:nvPr/>
         </p:nvPicPr>
         <p:blipFill rotWithShape="1">
-          <a:blip xmlns:r="http://schemas.openxmlformats.org/officeDocument/2006/relationships" xmlns:a="http://schemas.openxmlformats.org/drawingml/2006/main" r:embed="R89a1a610ed3f4886">
+          <a:blip xmlns:r="http://schemas.openxmlformats.org/officeDocument/2006/relationships" xmlns:a="http://schemas.openxmlformats.org/drawingml/2006/main" r:embed="R33c0d3e1e9e34f1f">
             <a:alphaModFix amt="28000"/>
           </a:blip>
           <a:stretch xmlns:a="http://schemas.openxmlformats.org/drawingml/2006/main"/>
@@ -3745,7 +3745,7 @@
           <p:nvPr/>
         </p:nvPicPr>
         <p:blipFill rotWithShape="1">
-          <a:blip xmlns:r="http://schemas.openxmlformats.org/officeDocument/2006/relationships" xmlns:a="http://schemas.openxmlformats.org/drawingml/2006/main" r:embed="R7dfbb6557cb2491b">
+          <a:blip xmlns:r="http://schemas.openxmlformats.org/officeDocument/2006/relationships" xmlns:a="http://schemas.openxmlformats.org/drawingml/2006/main" r:embed="R53ae1ec71a11400b">
             <a:alphaModFix amt="28000"/>
           </a:blip>
           <a:stretch xmlns:a="http://schemas.openxmlformats.org/drawingml/2006/main"/>
@@ -3982,17 +3982,17 @@
   </p:cSld>
   <p:clrMap bg1="lt1" tx1="dk1" bg2="lt2" tx2="dk2" accent1="accent1" accent2="accent2" accent3="accent3" accent4="accent4" accent5="accent5" accent6="accent6" hlink="hlink" folHlink="folHlink"/>
   <p:sldLayoutIdLst>
-    <p:sldLayoutId xmlns:r="http://schemas.openxmlformats.org/officeDocument/2006/relationships" id="2147483649" r:id="R8bed8cbac5e94965"/>
-    <p:sldLayoutId xmlns:r="http://schemas.openxmlformats.org/officeDocument/2006/relationships" id="2147483650" r:id="R2bfc873e48ae4e8b"/>
-    <p:sldLayoutId xmlns:r="http://schemas.openxmlformats.org/officeDocument/2006/relationships" id="2147483651" r:id="Rb8a4201ed9d14099"/>
-    <p:sldLayoutId xmlns:r="http://schemas.openxmlformats.org/officeDocument/2006/relationships" id="2147483652" r:id="R07e5f5a999664c30"/>
-    <p:sldLayoutId xmlns:r="http://schemas.openxmlformats.org/officeDocument/2006/relationships" id="2147483653" r:id="R4ae374b93d4a4d7b"/>
-    <p:sldLayoutId xmlns:r="http://schemas.openxmlformats.org/officeDocument/2006/relationships" id="2147483654" r:id="Rfab12ee41fee4f8c"/>
-    <p:sldLayoutId xmlns:r="http://schemas.openxmlformats.org/officeDocument/2006/relationships" id="2147483655" r:id="Rf0630cb4a21c4064"/>
-    <p:sldLayoutId xmlns:r="http://schemas.openxmlformats.org/officeDocument/2006/relationships" id="2147483656" r:id="R009d83009ae24103"/>
-    <p:sldLayoutId xmlns:r="http://schemas.openxmlformats.org/officeDocument/2006/relationships" id="2147483657" r:id="R5cdf5cee283f42cf"/>
-    <p:sldLayoutId xmlns:r="http://schemas.openxmlformats.org/officeDocument/2006/relationships" id="2147483658" r:id="R55ce979bd60a4d02"/>
-    <p:sldLayoutId xmlns:r="http://schemas.openxmlformats.org/officeDocument/2006/relationships" id="2147483659" r:id="Rffce237f647040fc"/>
+    <p:sldLayoutId xmlns:r="http://schemas.openxmlformats.org/officeDocument/2006/relationships" id="2147483649" r:id="Re523c28fc90b44a7"/>
+    <p:sldLayoutId xmlns:r="http://schemas.openxmlformats.org/officeDocument/2006/relationships" id="2147483650" r:id="R3bbd47f9e8664e10"/>
+    <p:sldLayoutId xmlns:r="http://schemas.openxmlformats.org/officeDocument/2006/relationships" id="2147483651" r:id="R665ddd10903b4b11"/>
+    <p:sldLayoutId xmlns:r="http://schemas.openxmlformats.org/officeDocument/2006/relationships" id="2147483652" r:id="R42bb1ba492304b73"/>
+    <p:sldLayoutId xmlns:r="http://schemas.openxmlformats.org/officeDocument/2006/relationships" id="2147483653" r:id="R70e4228692be4a31"/>
+    <p:sldLayoutId xmlns:r="http://schemas.openxmlformats.org/officeDocument/2006/relationships" id="2147483654" r:id="R4b32ed1572a040a5"/>
+    <p:sldLayoutId xmlns:r="http://schemas.openxmlformats.org/officeDocument/2006/relationships" id="2147483655" r:id="Rdc95606c22b044ae"/>
+    <p:sldLayoutId xmlns:r="http://schemas.openxmlformats.org/officeDocument/2006/relationships" id="2147483656" r:id="R482e983f96a54291"/>
+    <p:sldLayoutId xmlns:r="http://schemas.openxmlformats.org/officeDocument/2006/relationships" id="2147483657" r:id="R45d58e9d89024207"/>
+    <p:sldLayoutId xmlns:r="http://schemas.openxmlformats.org/officeDocument/2006/relationships" id="2147483658" r:id="R15b4d66f9420483c"/>
+    <p:sldLayoutId xmlns:r="http://schemas.openxmlformats.org/officeDocument/2006/relationships" id="2147483659" r:id="R5ba3040fb5854dd4"/>
   </p:sldLayoutIdLst>
   <p:hf hdr="0" ftr="0" dt="0"/>
   <p:txStyles>
@@ -4931,24 +4931,13 @@
             <a:r>
               <a:rPr sz="2400">
                 <a:solidFill>
-                  <a:srgbClr val="080808"/>
-                </a:solidFill>
-                <a:latin typeface="JetBrains Mono"/>
-                <a:ea typeface="JetBrains Mono"/>
-                <a:cs typeface="JetBrains Mono"/>
-              </a:rPr>
-              <a:t> </a:t>
-            </a:r>
-            <a:r>
-              <a:rPr sz="2400">
-                <a:solidFill>
                   <a:srgbClr val="1750EB"/>
                 </a:solidFill>
                 <a:latin typeface="JetBrains Mono"/>
                 <a:ea typeface="JetBrains Mono"/>
                 <a:cs typeface="JetBrains Mono"/>
               </a:rPr>
-              <a:t>range</a:t>
+              <a:t> range</a:t>
             </a:r>
             <a:r>
               <a:rPr sz="2400">
@@ -4972,24 +4961,13 @@
             <a:r>
               <a:rPr sz="2400">
                 <a:solidFill>
-                  <a:srgbClr val="080808"/>
-                </a:solidFill>
-                <a:latin typeface="JetBrains Mono"/>
-                <a:ea typeface="JetBrains Mono"/>
-                <a:cs typeface="JetBrains Mono"/>
-              </a:rPr>
-              <a:t>    </a:t>
-            </a:r>
-            <a:r>
-              <a:rPr sz="2400">
-                <a:solidFill>
                   <a:srgbClr val="1750EB"/>
                 </a:solidFill>
                 <a:latin typeface="JetBrains Mono"/>
                 <a:ea typeface="JetBrains Mono"/>
                 <a:cs typeface="JetBrains Mono"/>
               </a:rPr>
-              <a:t>print</a:t>
+              <a:t>    print</a:t>
             </a:r>
             <a:r>
               <a:rPr sz="2400">
@@ -5098,24 +5076,13 @@
             <a:r>
               <a:rPr sz="2400">
                 <a:solidFill>
-                  <a:srgbClr val="080808"/>
-                </a:solidFill>
-                <a:latin typeface="JetBrains Mono"/>
-                <a:ea typeface="JetBrains Mono"/>
-                <a:cs typeface="JetBrains Mono"/>
-              </a:rPr>
-              <a:t> </a:t>
-            </a:r>
-            <a:r>
-              <a:rPr sz="2400">
-                <a:solidFill>
                   <a:srgbClr val="067D17"/>
                 </a:solidFill>
                 <a:latin typeface="JetBrains Mono"/>
                 <a:ea typeface="JetBrains Mono"/>
                 <a:cs typeface="JetBrains Mono"/>
               </a:rPr>
-              <a:t>"done"</a:t>
+              <a:t> "done"</a:t>
             </a:r>
             <a:r>
               <a:rPr sz="2400">
@@ -5564,24 +5531,13 @@
             <a:r>
               <a:rPr sz="2400">
                 <a:solidFill>
-                  <a:srgbClr val="080808"/>
-                </a:solidFill>
-                <a:latin typeface="JetBrains Mono"/>
-                <a:ea typeface="JetBrains Mono"/>
-                <a:cs typeface="JetBrains Mono"/>
-              </a:rPr>
-              <a:t> </a:t>
-            </a:r>
-            <a:r>
-              <a:rPr sz="2400">
-                <a:solidFill>
                   <a:srgbClr val="1750EB"/>
                 </a:solidFill>
                 <a:latin typeface="JetBrains Mono"/>
                 <a:ea typeface="JetBrains Mono"/>
                 <a:cs typeface="JetBrains Mono"/>
               </a:rPr>
-              <a:t>range</a:t>
+              <a:t> range</a:t>
             </a:r>
             <a:r>
               <a:rPr sz="2400">
@@ -5605,24 +5561,13 @@
             <a:r>
               <a:rPr sz="2400">
                 <a:solidFill>
-                  <a:srgbClr val="080808"/>
-                </a:solidFill>
-                <a:latin typeface="JetBrains Mono"/>
-                <a:ea typeface="JetBrains Mono"/>
-                <a:cs typeface="JetBrains Mono"/>
-              </a:rPr>
-              <a:t>    </a:t>
-            </a:r>
-            <a:r>
-              <a:rPr sz="2400">
-                <a:solidFill>
                   <a:srgbClr val="1750EB"/>
                 </a:solidFill>
                 <a:latin typeface="JetBrains Mono"/>
                 <a:ea typeface="JetBrains Mono"/>
                 <a:cs typeface="JetBrains Mono"/>
               </a:rPr>
-              <a:t>print</a:t>
+              <a:t>    print</a:t>
             </a:r>
             <a:r>
               <a:rPr sz="2400">
@@ -5731,24 +5676,13 @@
             <a:r>
               <a:rPr sz="2400">
                 <a:solidFill>
-                  <a:srgbClr val="080808"/>
-                </a:solidFill>
-                <a:latin typeface="JetBrains Mono"/>
-                <a:ea typeface="JetBrains Mono"/>
-                <a:cs typeface="JetBrains Mono"/>
-              </a:rPr>
-              <a:t> </a:t>
-            </a:r>
-            <a:r>
-              <a:rPr sz="2400">
-                <a:solidFill>
                   <a:srgbClr val="067D17"/>
                 </a:solidFill>
                 <a:latin typeface="JetBrains Mono"/>
                 <a:ea typeface="JetBrains Mono"/>
                 <a:cs typeface="JetBrains Mono"/>
               </a:rPr>
-              <a:t>"done"</a:t>
+              <a:t> "done"</a:t>
             </a:r>
             <a:r>
               <a:rPr sz="2400">
@@ -6197,24 +6131,13 @@
             <a:r>
               <a:rPr sz="2400">
                 <a:solidFill>
-                  <a:srgbClr val="080808"/>
-                </a:solidFill>
-                <a:latin typeface="JetBrains Mono"/>
-                <a:ea typeface="JetBrains Mono"/>
-                <a:cs typeface="JetBrains Mono"/>
-              </a:rPr>
-              <a:t> </a:t>
-            </a:r>
-            <a:r>
-              <a:rPr sz="2400">
-                <a:solidFill>
                   <a:srgbClr val="1750EB"/>
                 </a:solidFill>
                 <a:latin typeface="JetBrains Mono"/>
                 <a:ea typeface="JetBrains Mono"/>
                 <a:cs typeface="JetBrains Mono"/>
               </a:rPr>
-              <a:t>range</a:t>
+              <a:t> range</a:t>
             </a:r>
             <a:r>
               <a:rPr sz="2400">
@@ -6238,24 +6161,13 @@
             <a:r>
               <a:rPr sz="2400">
                 <a:solidFill>
-                  <a:srgbClr val="080808"/>
-                </a:solidFill>
-                <a:latin typeface="JetBrains Mono"/>
-                <a:ea typeface="JetBrains Mono"/>
-                <a:cs typeface="JetBrains Mono"/>
-              </a:rPr>
-              <a:t>    </a:t>
-            </a:r>
-            <a:r>
-              <a:rPr sz="2400">
-                <a:solidFill>
                   <a:srgbClr val="1750EB"/>
                 </a:solidFill>
                 <a:latin typeface="JetBrains Mono"/>
                 <a:ea typeface="JetBrains Mono"/>
                 <a:cs typeface="JetBrains Mono"/>
               </a:rPr>
-              <a:t>print</a:t>
+              <a:t>    print</a:t>
             </a:r>
             <a:r>
               <a:rPr sz="2400">
@@ -6364,24 +6276,13 @@
             <a:r>
               <a:rPr sz="2400">
                 <a:solidFill>
-                  <a:srgbClr val="080808"/>
-                </a:solidFill>
-                <a:latin typeface="JetBrains Mono"/>
-                <a:ea typeface="JetBrains Mono"/>
-                <a:cs typeface="JetBrains Mono"/>
-              </a:rPr>
-              <a:t> </a:t>
-            </a:r>
-            <a:r>
-              <a:rPr sz="2400">
-                <a:solidFill>
                   <a:srgbClr val="067D17"/>
                 </a:solidFill>
                 <a:latin typeface="JetBrains Mono"/>
                 <a:ea typeface="JetBrains Mono"/>
                 <a:cs typeface="JetBrains Mono"/>
               </a:rPr>
-              <a:t>"done"</a:t>
+              <a:t> "done"</a:t>
             </a:r>
             <a:r>
               <a:rPr sz="2400">
@@ -7081,24 +6982,13 @@
             <a:r>
               <a:rPr sz="1400">
                 <a:solidFill>
-                  <a:srgbClr val="080808"/>
-                </a:solidFill>
-                <a:latin typeface="JetBrains Mono"/>
-                <a:ea typeface="JetBrains Mono"/>
-                <a:cs typeface="JetBrains Mono"/>
-              </a:rPr>
-              <a:t> </a:t>
-            </a:r>
-            <a:r>
-              <a:rPr sz="1400">
-                <a:solidFill>
                   <a:srgbClr val="1750EB"/>
                 </a:solidFill>
                 <a:latin typeface="JetBrains Mono"/>
                 <a:ea typeface="JetBrains Mono"/>
                 <a:cs typeface="JetBrains Mono"/>
               </a:rPr>
-              <a:t>range</a:t>
+              <a:t> range</a:t>
             </a:r>
             <a:r>
               <a:rPr sz="1400">
@@ -7124,24 +7014,13 @@
             <a:r>
               <a:rPr sz="1400">
                 <a:solidFill>
-                  <a:srgbClr val="080808"/>
-                </a:solidFill>
-                <a:latin typeface="JetBrains Mono"/>
-                <a:ea typeface="JetBrains Mono"/>
-                <a:cs typeface="JetBrains Mono"/>
-              </a:rPr>
-              <a:t>    </a:t>
-            </a:r>
-            <a:r>
-              <a:rPr sz="1400">
-                <a:solidFill>
                   <a:srgbClr val="1750EB"/>
                 </a:solidFill>
                 <a:latin typeface="JetBrains Mono"/>
                 <a:ea typeface="JetBrains Mono"/>
                 <a:cs typeface="JetBrains Mono"/>
               </a:rPr>
-              <a:t>print</a:t>
+              <a:t>    print</a:t>
             </a:r>
             <a:r>
               <a:rPr sz="1400">
@@ -7254,24 +7133,13 @@
             <a:r>
               <a:rPr sz="1400">
                 <a:solidFill>
-                  <a:srgbClr val="080808"/>
-                </a:solidFill>
-                <a:latin typeface="JetBrains Mono"/>
-                <a:ea typeface="JetBrains Mono"/>
-                <a:cs typeface="JetBrains Mono"/>
-              </a:rPr>
-              <a:t> </a:t>
-            </a:r>
-            <a:r>
-              <a:rPr sz="1400">
-                <a:solidFill>
                   <a:srgbClr val="067D17"/>
                 </a:solidFill>
                 <a:latin typeface="JetBrains Mono"/>
                 <a:ea typeface="JetBrains Mono"/>
                 <a:cs typeface="JetBrains Mono"/>
               </a:rPr>
-              <a:t>"done"</a:t>
+              <a:t> "done"</a:t>
             </a:r>
             <a:r>
               <a:rPr sz="1400">
@@ -7952,24 +7820,13 @@
             <a:r>
               <a:rPr sz="1400">
                 <a:solidFill>
-                  <a:srgbClr val="080808"/>
-                </a:solidFill>
-                <a:latin typeface="JetBrains Mono"/>
-                <a:ea typeface="JetBrains Mono"/>
-                <a:cs typeface="JetBrains Mono"/>
-              </a:rPr>
-              <a:t> </a:t>
-            </a:r>
-            <a:r>
-              <a:rPr sz="1400">
-                <a:solidFill>
                   <a:srgbClr val="1750EB"/>
                 </a:solidFill>
                 <a:latin typeface="JetBrains Mono"/>
                 <a:ea typeface="JetBrains Mono"/>
                 <a:cs typeface="JetBrains Mono"/>
               </a:rPr>
-              <a:t>range</a:t>
+              <a:t> range</a:t>
             </a:r>
             <a:r>
               <a:rPr sz="1400">
@@ -7995,24 +7852,13 @@
             <a:r>
               <a:rPr sz="1400">
                 <a:solidFill>
-                  <a:srgbClr val="080808"/>
-                </a:solidFill>
-                <a:latin typeface="JetBrains Mono"/>
-                <a:ea typeface="JetBrains Mono"/>
-                <a:cs typeface="JetBrains Mono"/>
-              </a:rPr>
-              <a:t>    </a:t>
-            </a:r>
-            <a:r>
-              <a:rPr sz="1400">
-                <a:solidFill>
                   <a:srgbClr val="1750EB"/>
                 </a:solidFill>
                 <a:latin typeface="JetBrains Mono"/>
                 <a:ea typeface="JetBrains Mono"/>
                 <a:cs typeface="JetBrains Mono"/>
               </a:rPr>
-              <a:t>print</a:t>
+              <a:t>    print</a:t>
             </a:r>
             <a:r>
               <a:rPr sz="1400">
@@ -8125,24 +7971,13 @@
             <a:r>
               <a:rPr sz="1400">
                 <a:solidFill>
-                  <a:srgbClr val="080808"/>
-                </a:solidFill>
-                <a:latin typeface="JetBrains Mono"/>
-                <a:ea typeface="JetBrains Mono"/>
-                <a:cs typeface="JetBrains Mono"/>
-              </a:rPr>
-              <a:t> </a:t>
-            </a:r>
-            <a:r>
-              <a:rPr sz="1400">
-                <a:solidFill>
                   <a:srgbClr val="067D17"/>
                 </a:solidFill>
                 <a:latin typeface="JetBrains Mono"/>
                 <a:ea typeface="JetBrains Mono"/>
                 <a:cs typeface="JetBrains Mono"/>
               </a:rPr>
-              <a:t>"done"</a:t>
+              <a:t> "done"</a:t>
             </a:r>
             <a:r>
               <a:rPr sz="1400">
@@ -8889,24 +8724,13 @@
             <a:r>
               <a:rPr sz="1400">
                 <a:solidFill>
-                  <a:srgbClr val="080808"/>
-                </a:solidFill>
-                <a:latin typeface="JetBrains Mono"/>
-                <a:ea typeface="JetBrains Mono"/>
-                <a:cs typeface="JetBrains Mono"/>
-              </a:rPr>
-              <a:t> </a:t>
-            </a:r>
-            <a:r>
-              <a:rPr sz="1400">
-                <a:solidFill>
                   <a:srgbClr val="1750EB"/>
                 </a:solidFill>
                 <a:latin typeface="JetBrains Mono"/>
                 <a:ea typeface="JetBrains Mono"/>
                 <a:cs typeface="JetBrains Mono"/>
               </a:rPr>
-              <a:t>range</a:t>
+              <a:t> range</a:t>
             </a:r>
             <a:r>
               <a:rPr sz="1400">
@@ -8932,24 +8756,13 @@
             <a:r>
               <a:rPr sz="1400">
                 <a:solidFill>
-                  <a:srgbClr val="080808"/>
-                </a:solidFill>
-                <a:latin typeface="JetBrains Mono"/>
-                <a:ea typeface="JetBrains Mono"/>
-                <a:cs typeface="JetBrains Mono"/>
-              </a:rPr>
-              <a:t>    </a:t>
-            </a:r>
-            <a:r>
-              <a:rPr sz="1400">
-                <a:solidFill>
                   <a:srgbClr val="1750EB"/>
                 </a:solidFill>
                 <a:latin typeface="JetBrains Mono"/>
                 <a:ea typeface="JetBrains Mono"/>
                 <a:cs typeface="JetBrains Mono"/>
               </a:rPr>
-              <a:t>print</a:t>
+              <a:t>    print</a:t>
             </a:r>
             <a:r>
               <a:rPr sz="1400">
@@ -9062,24 +8875,13 @@
             <a:r>
               <a:rPr sz="1400">
                 <a:solidFill>
-                  <a:srgbClr val="080808"/>
-                </a:solidFill>
-                <a:latin typeface="JetBrains Mono"/>
-                <a:ea typeface="JetBrains Mono"/>
-                <a:cs typeface="JetBrains Mono"/>
-              </a:rPr>
-              <a:t> </a:t>
-            </a:r>
-            <a:r>
-              <a:rPr sz="1400">
-                <a:solidFill>
                   <a:srgbClr val="067D17"/>
                 </a:solidFill>
                 <a:latin typeface="JetBrains Mono"/>
                 <a:ea typeface="JetBrains Mono"/>
                 <a:cs typeface="JetBrains Mono"/>
               </a:rPr>
-              <a:t>"done"</a:t>
+              <a:t> "done"</a:t>
             </a:r>
             <a:r>
               <a:rPr sz="1400">
@@ -9732,24 +9534,13 @@
             <a:r>
               <a:rPr sz="1400">
                 <a:solidFill>
-                  <a:srgbClr val="080808"/>
-                </a:solidFill>
-                <a:latin typeface="JetBrains Mono"/>
-                <a:ea typeface="JetBrains Mono"/>
-                <a:cs typeface="JetBrains Mono"/>
-              </a:rPr>
-              <a:t> </a:t>
-            </a:r>
-            <a:r>
-              <a:rPr sz="1400">
-                <a:solidFill>
                   <a:srgbClr val="1750EB"/>
                 </a:solidFill>
                 <a:latin typeface="JetBrains Mono"/>
                 <a:ea typeface="JetBrains Mono"/>
                 <a:cs typeface="JetBrains Mono"/>
               </a:rPr>
-              <a:t>range</a:t>
+              <a:t> range</a:t>
             </a:r>
             <a:r>
               <a:rPr sz="1400">
@@ -9775,24 +9566,13 @@
             <a:r>
               <a:rPr sz="1400">
                 <a:solidFill>
-                  <a:srgbClr val="080808"/>
-                </a:solidFill>
-                <a:latin typeface="JetBrains Mono"/>
-                <a:ea typeface="JetBrains Mono"/>
-                <a:cs typeface="JetBrains Mono"/>
-              </a:rPr>
-              <a:t>    </a:t>
-            </a:r>
-            <a:r>
-              <a:rPr sz="1400">
-                <a:solidFill>
                   <a:srgbClr val="1750EB"/>
                 </a:solidFill>
                 <a:latin typeface="JetBrains Mono"/>
                 <a:ea typeface="JetBrains Mono"/>
                 <a:cs typeface="JetBrains Mono"/>
               </a:rPr>
-              <a:t>print</a:t>
+              <a:t>    print</a:t>
             </a:r>
             <a:r>
               <a:rPr sz="1400">
@@ -9905,24 +9685,13 @@
             <a:r>
               <a:rPr sz="1400">
                 <a:solidFill>
-                  <a:srgbClr val="080808"/>
-                </a:solidFill>
-                <a:latin typeface="JetBrains Mono"/>
-                <a:ea typeface="JetBrains Mono"/>
-                <a:cs typeface="JetBrains Mono"/>
-              </a:rPr>
-              <a:t> </a:t>
-            </a:r>
-            <a:r>
-              <a:rPr sz="1400">
-                <a:solidFill>
                   <a:srgbClr val="067D17"/>
                 </a:solidFill>
                 <a:latin typeface="JetBrains Mono"/>
                 <a:ea typeface="JetBrains Mono"/>
                 <a:cs typeface="JetBrains Mono"/>
               </a:rPr>
-              <a:t>"done"</a:t>
+              <a:t> "done"</a:t>
             </a:r>
             <a:r>
               <a:rPr sz="1400">
@@ -10223,24 +9992,13 @@
             <a:r>
               <a:rPr sz="1800">
                 <a:solidFill>
-                  <a:srgbClr val="080808"/>
-                </a:solidFill>
-                <a:latin typeface="JetBrains Mono"/>
-                <a:ea typeface="JetBrains Mono"/>
-                <a:cs typeface="JetBrains Mono"/>
-              </a:rPr>
-              <a:t> </a:t>
-            </a:r>
-            <a:r>
-              <a:rPr sz="1800">
-                <a:solidFill>
                   <a:srgbClr val="1750EB"/>
                 </a:solidFill>
                 <a:latin typeface="JetBrains Mono"/>
                 <a:ea typeface="JetBrains Mono"/>
                 <a:cs typeface="JetBrains Mono"/>
               </a:rPr>
-              <a:t>range</a:t>
+              <a:t> range</a:t>
             </a:r>
             <a:r>
               <a:rPr sz="1800">
@@ -10264,24 +10022,13 @@
             <a:r>
               <a:rPr sz="1800">
                 <a:solidFill>
-                  <a:srgbClr val="080808"/>
-                </a:solidFill>
-                <a:latin typeface="JetBrains Mono"/>
-                <a:ea typeface="JetBrains Mono"/>
-                <a:cs typeface="JetBrains Mono"/>
-              </a:rPr>
-              <a:t>    </a:t>
-            </a:r>
-            <a:r>
-              <a:rPr sz="1800">
-                <a:solidFill>
                   <a:srgbClr val="1750EB"/>
                 </a:solidFill>
                 <a:latin typeface="JetBrains Mono"/>
                 <a:ea typeface="JetBrains Mono"/>
                 <a:cs typeface="JetBrains Mono"/>
               </a:rPr>
-              <a:t>print</a:t>
+              <a:t>    print</a:t>
             </a:r>
             <a:r>
               <a:rPr sz="1800">
@@ -10390,24 +10137,13 @@
             <a:r>
               <a:rPr sz="1800">
                 <a:solidFill>
-                  <a:srgbClr val="080808"/>
-                </a:solidFill>
-                <a:latin typeface="JetBrains Mono"/>
-                <a:ea typeface="JetBrains Mono"/>
-                <a:cs typeface="JetBrains Mono"/>
-              </a:rPr>
-              <a:t> </a:t>
-            </a:r>
-            <a:r>
-              <a:rPr sz="1800">
-                <a:solidFill>
                   <a:srgbClr val="067D17"/>
                 </a:solidFill>
                 <a:latin typeface="JetBrains Mono"/>
                 <a:ea typeface="JetBrains Mono"/>
                 <a:cs typeface="JetBrains Mono"/>
               </a:rPr>
-              <a:t>"done"</a:t>
+              <a:t> "done"</a:t>
             </a:r>
             <a:r>
               <a:rPr sz="1800">
@@ -10431,24 +10167,13 @@
             <a:r>
               <a:rPr sz="1800">
                 <a:solidFill>
-                  <a:srgbClr val="080808"/>
-                </a:solidFill>
-                <a:latin typeface="JetBrains Mono"/>
-                <a:ea typeface="JetBrains Mono"/>
-                <a:cs typeface="JetBrains Mono"/>
-              </a:rPr>
-              <a:t>    </a:t>
-            </a:r>
-            <a:r>
-              <a:rPr sz="1800">
-                <a:solidFill>
                   <a:srgbClr val="1750EB"/>
                 </a:solidFill>
                 <a:latin typeface="JetBrains Mono"/>
                 <a:ea typeface="JetBrains Mono"/>
                 <a:cs typeface="JetBrains Mono"/>
               </a:rPr>
-              <a:t>input</a:t>
+              <a:t>    input</a:t>
             </a:r>
             <a:r>
               <a:rPr sz="1800">
